--- a/clientes/flavia-muccelin/Duas-Trajetorias-Uma-Nova-Forca-Flavia-e-Elandi.pptx
+++ b/clientes/flavia-muccelin/Duas-Trajetorias-Uma-Nova-Forca-Flavia-e-Elandi.pptx
@@ -6328,7 +6328,7 @@
         </p:nvSpPr>
         <p:spPr>
           <a:xfrm>
-            <a:off x="2011680" y="7415987"/>
+            <a:off x="2011680" y="7443419"/>
             <a:ext cx="11521440" cy="292608"/>
           </a:xfrm>
           <a:prstGeom prst="rect">
@@ -6367,7 +6367,7 @@
         </p:nvSpPr>
         <p:spPr>
           <a:xfrm>
-            <a:off x="2011680" y="7982915"/>
+            <a:off x="2011680" y="7845755"/>
             <a:ext cx="11521440" cy="841045"/>
           </a:xfrm>
           <a:prstGeom prst="rect">

--- a/clientes/flavia-muccelin/Duas-Trajetorias-Uma-Nova-Forca-Flavia-e-Elandi.pptx
+++ b/clientes/flavia-muccelin/Duas-Trajetorias-Uma-Nova-Forca-Flavia-e-Elandi.pptx
@@ -6328,8 +6328,8 @@
         </p:nvSpPr>
         <p:spPr>
           <a:xfrm>
-            <a:off x="2011680" y="7443419"/>
-            <a:ext cx="11521440" cy="292608"/>
+            <a:off x="2011680" y="7845755"/>
+            <a:ext cx="11521440" cy="859333"/>
           </a:xfrm>
           <a:prstGeom prst="rect">
             <a:avLst/>
@@ -6344,7 +6344,7 @@
           <a:p>
             <a:pPr algn="l">
               <a:lnSpc>
-                <a:spcPct val="140000"/>
+                <a:spcPct val="130000"/>
               </a:lnSpc>
             </a:pPr>
             <a:r>
@@ -6354,38 +6354,8 @@
                 </a:solidFill>
                 <a:latin typeface="Outfit 1 Semi-Bold"/>
               </a:rPr>
-              <a:t>IMAGEM</a:t>
-            </a:r>
-          </a:p>
-        </p:txBody>
-      </p:sp>
-      <p:sp>
-        <p:nvSpPr>
-          <p:cNvPr id="8" name="TextBox 7"/>
-          <p:cNvSpPr txBox="1"/>
-          <p:nvPr/>
-        </p:nvSpPr>
-        <p:spPr>
-          <a:xfrm>
-            <a:off x="2011680" y="7845755"/>
-            <a:ext cx="11521440" cy="841045"/>
-          </a:xfrm>
-          <a:prstGeom prst="rect">
-            <a:avLst/>
-          </a:prstGeom>
-          <a:noFill/>
-        </p:spPr>
-        <p:txBody>
-          <a:bodyPr wrap="square" anchor="t" lIns="0" rIns="0" tIns="0" bIns="0">
-            <a:spAutoFit/>
-          </a:bodyPr>
-          <a:lstStyle/>
-          <a:p>
-            <a:pPr algn="l">
-              <a:lnSpc>
-                <a:spcPct val="140000"/>
-              </a:lnSpc>
-            </a:pPr>
+              <a:t>IMAGEM   </a:t>
+            </a:r>
             <a:r>
               <a:rPr sz="1700" i="0" b="0">
                 <a:solidFill>

--- a/clientes/flavia-muccelin/Duas-Trajetorias-Uma-Nova-Forca-Flavia-e-Elandi.pptx
+++ b/clientes/flavia-muccelin/Duas-Trajetorias-Uma-Nova-Forca-Flavia-e-Elandi.pptx
@@ -6190,8 +6190,8 @@
         </p:nvSpPr>
         <p:spPr>
           <a:xfrm>
-            <a:off x="2011680" y="3790185"/>
-            <a:ext cx="14081760" cy="1835762"/>
+            <a:off x="2011680" y="3383829"/>
+            <a:ext cx="14081760" cy="2734788"/>
           </a:xfrm>
           <a:prstGeom prst="rect">
             <a:avLst/>
@@ -6210,7 +6210,7 @@
               </a:lnSpc>
             </a:pPr>
             <a:r>
-              <a:rPr sz="3934" i="0" b="0">
+              <a:rPr sz="6200" i="0" b="0">
                 <a:solidFill>
                   <a:srgbClr val="FFFFFF"/>
                 </a:solidFill>
@@ -6226,7 +6226,7 @@
               </a:lnSpc>
             </a:pPr>
             <a:r>
-              <a:rPr sz="3934" i="0" b="0">
+              <a:rPr sz="6200" i="0" b="0">
                 <a:solidFill>
                   <a:srgbClr val="FFFFFF"/>
                 </a:solidFill>
@@ -6245,7 +6245,7 @@
         </p:nvSpPr>
         <p:spPr>
           <a:xfrm>
-            <a:off x="2011680" y="5439463"/>
+            <a:off x="2011680" y="5845821"/>
             <a:ext cx="1188720" cy="27432"/>
           </a:xfrm>
           <a:prstGeom prst="rect">
@@ -6289,7 +6289,7 @@
         </p:nvSpPr>
         <p:spPr>
           <a:xfrm>
-            <a:off x="2011680" y="5713783"/>
+            <a:off x="2011680" y="6120141"/>
             <a:ext cx="11887200" cy="554431"/>
           </a:xfrm>
           <a:prstGeom prst="rect">
@@ -9510,7 +9510,7 @@
         </p:nvSpPr>
         <p:spPr>
           <a:xfrm>
-            <a:off x="2011680" y="3148867"/>
+            <a:off x="2011680" y="2894259"/>
             <a:ext cx="1188720" cy="27432"/>
           </a:xfrm>
           <a:prstGeom prst="rect">
@@ -9554,8 +9554,8 @@
         </p:nvSpPr>
         <p:spPr>
           <a:xfrm>
-            <a:off x="2011680" y="3551203"/>
-            <a:ext cx="14081760" cy="2647712"/>
+            <a:off x="2011680" y="3296595"/>
+            <a:ext cx="14081760" cy="3211007"/>
           </a:xfrm>
           <a:prstGeom prst="rect">
             <a:avLst/>
@@ -9574,7 +9574,7 @@
               </a:lnSpc>
             </a:pPr>
             <a:r>
-              <a:rPr sz="5980" i="0" b="0">
+              <a:rPr sz="7400" i="0" b="0">
                 <a:solidFill>
                   <a:srgbClr val="1C1C1A"/>
                 </a:solidFill>
@@ -9590,7 +9590,7 @@
               </a:lnSpc>
             </a:pPr>
             <a:r>
-              <a:rPr sz="5980" i="0" b="0">
+              <a:rPr sz="7400" i="0" b="0">
                 <a:solidFill>
                   <a:srgbClr val="1C1C1A"/>
                 </a:solidFill>
@@ -9609,7 +9609,7 @@
         </p:nvSpPr>
         <p:spPr>
           <a:xfrm>
-            <a:off x="2011680" y="6080782"/>
+            <a:off x="2011680" y="6335390"/>
             <a:ext cx="11887200" cy="554431"/>
           </a:xfrm>
           <a:prstGeom prst="rect">
@@ -9929,7 +9929,7 @@
         </p:nvSpPr>
         <p:spPr>
           <a:xfrm>
-            <a:off x="2011680" y="3350979"/>
+            <a:off x="2011680" y="2708361"/>
             <a:ext cx="1188720" cy="27432"/>
           </a:xfrm>
           <a:prstGeom prst="rect">
@@ -9973,8 +9973,8 @@
         </p:nvSpPr>
         <p:spPr>
           <a:xfrm>
-            <a:off x="2011680" y="3753315"/>
-            <a:ext cx="14081760" cy="2679785"/>
+            <a:off x="2011680" y="3110697"/>
+            <a:ext cx="14081760" cy="3965021"/>
           </a:xfrm>
           <a:prstGeom prst="rect">
             <a:avLst/>
@@ -9993,7 +9993,7 @@
               </a:lnSpc>
             </a:pPr>
             <a:r>
-              <a:rPr sz="4040" i="0" b="0">
+              <a:rPr sz="6200" i="0" b="0">
                 <a:solidFill>
                   <a:srgbClr val="1C1C1A"/>
                 </a:solidFill>
@@ -10009,7 +10009,7 @@
               </a:lnSpc>
             </a:pPr>
             <a:r>
-              <a:rPr sz="4040" i="0" b="0">
+              <a:rPr sz="6200" i="0" b="0">
                 <a:solidFill>
                   <a:srgbClr val="1C1C1A"/>
                 </a:solidFill>
@@ -10025,7 +10025,7 @@
               </a:lnSpc>
             </a:pPr>
             <a:r>
-              <a:rPr sz="4040" i="0" b="0">
+              <a:rPr sz="6200" i="0" b="0">
                 <a:solidFill>
                   <a:srgbClr val="1C1C1A"/>
                 </a:solidFill>

--- a/clientes/flavia-muccelin/Duas-Trajetorias-Uma-Nova-Forca-Flavia-e-Elandi.pptx
+++ b/clientes/flavia-muccelin/Duas-Trajetorias-Uma-Nova-Forca-Flavia-e-Elandi.pptx
@@ -3361,14 +3361,14 @@
         </p:nvSpPr>
         <p:spPr>
           <a:xfrm>
-            <a:off x="594360" y="4010101"/>
+            <a:off x="594360" y="4037838"/>
             <a:ext cx="1188720" cy="27432"/>
           </a:xfrm>
           <a:prstGeom prst="rect">
             <a:avLst/>
           </a:prstGeom>
           <a:solidFill>
-            <a:srgbClr val="A9724A"/>
+            <a:srgbClr val="CC754E"/>
           </a:solidFill>
           <a:ln>
             <a:noFill/>
@@ -3405,7 +3405,7 @@
         </p:nvSpPr>
         <p:spPr>
           <a:xfrm>
-            <a:off x="594360" y="4320997"/>
+            <a:off x="594360" y="4348734"/>
             <a:ext cx="5760720" cy="292608"/>
           </a:xfrm>
           <a:prstGeom prst="rect">
@@ -3421,13 +3421,13 @@
           <a:p>
             <a:pPr algn="l">
               <a:lnSpc>
-                <a:spcPct val="140000"/>
+                <a:spcPts val="1959"/>
               </a:lnSpc>
             </a:pPr>
             <a:r>
               <a:rPr sz="1400" i="0" b="0" spc="300">
                 <a:solidFill>
-                  <a:srgbClr val="A9724A"/>
+                  <a:srgbClr val="CC754E"/>
                 </a:solidFill>
                 <a:latin typeface="Outfit 1 Semi-Bold"/>
               </a:rPr>
@@ -3444,8 +3444,8 @@
         </p:nvSpPr>
         <p:spPr>
           <a:xfrm>
-            <a:off x="594360" y="4887925"/>
-            <a:ext cx="5760720" cy="1480414"/>
+            <a:off x="594360" y="4915662"/>
+            <a:ext cx="5760720" cy="1424940"/>
           </a:xfrm>
           <a:prstGeom prst="rect">
             <a:avLst/>
@@ -3460,11 +3460,11 @@
           <a:p>
             <a:pPr algn="l">
               <a:lnSpc>
-                <a:spcPct val="140000"/>
+                <a:spcPts val="3500"/>
               </a:lnSpc>
             </a:pPr>
             <a:r>
-              <a:rPr sz="2100" i="0" b="0">
+              <a:rPr sz="2500" i="0" b="0">
                 <a:solidFill>
                   <a:srgbClr val="6B6B66"/>
                 </a:solidFill>
@@ -3527,8 +3527,8 @@
         </p:nvSpPr>
         <p:spPr>
           <a:xfrm>
-            <a:off x="7818120" y="2477628"/>
-            <a:ext cx="9601200" cy="882396"/>
+            <a:off x="7818120" y="2547112"/>
+            <a:ext cx="9601200" cy="1005078"/>
           </a:xfrm>
           <a:prstGeom prst="rect">
             <a:avLst/>
@@ -3543,7 +3543,7 @@
           <a:p>
             <a:pPr algn="l">
               <a:lnSpc>
-                <a:spcPct val="114000"/>
+                <a:spcPts val="5754"/>
               </a:lnSpc>
             </a:pPr>
             <a:r>
@@ -3553,7 +3553,16 @@
                 </a:solidFill>
                 <a:latin typeface="Outfit 1 Light"/>
               </a:rPr>
-              <a:t>FLÁVIA É MAIS DO QUE A FUNDADORA</a:t>
+              <a:t>FLÁVIA É </a:t>
+            </a:r>
+            <a:r>
+              <a:rPr sz="4200" i="0" b="0">
+                <a:solidFill>
+                  <a:srgbClr val="1C1C1A"/>
+                </a:solidFill>
+                <a:latin typeface="Outfit 1 Bold"/>
+              </a:rPr>
+              <a:t>MAIS DO QUE A FUNDADORA</a:t>
             </a:r>
           </a:p>
         </p:txBody>
@@ -3566,14 +3575,14 @@
         </p:nvSpPr>
         <p:spPr>
           <a:xfrm>
-            <a:off x="7818120" y="4168536"/>
+            <a:off x="7818120" y="4191508"/>
             <a:ext cx="9601200" cy="10973"/>
           </a:xfrm>
           <a:prstGeom prst="rect">
             <a:avLst/>
           </a:prstGeom>
           <a:solidFill>
-            <a:srgbClr val="DFDDD7"/>
+            <a:srgbClr val="A5A49F"/>
           </a:solidFill>
           <a:ln>
             <a:noFill/>
@@ -3610,8 +3619,8 @@
         </p:nvSpPr>
         <p:spPr>
           <a:xfrm>
-            <a:off x="7818120" y="4516008"/>
-            <a:ext cx="9601200" cy="1017422"/>
+            <a:off x="7818120" y="4538980"/>
+            <a:ext cx="9601200" cy="980440"/>
           </a:xfrm>
           <a:prstGeom prst="rect">
             <a:avLst/>
@@ -3626,11 +3635,11 @@
           <a:p>
             <a:pPr algn="l">
               <a:lnSpc>
-                <a:spcPct val="140000"/>
+                <a:spcPts val="3500"/>
               </a:lnSpc>
             </a:pPr>
             <a:r>
-              <a:rPr sz="2100" i="0" b="0">
+              <a:rPr sz="2500" i="0" b="0">
                 <a:solidFill>
                   <a:srgbClr val="6B6B66"/>
                 </a:solidFill>
@@ -3649,8 +3658,8 @@
         </p:nvSpPr>
         <p:spPr>
           <a:xfrm>
-            <a:off x="7818120" y="5771175"/>
-            <a:ext cx="9601200" cy="1017422"/>
+            <a:off x="7818120" y="5757164"/>
+            <a:ext cx="9601200" cy="980440"/>
           </a:xfrm>
           <a:prstGeom prst="rect">
             <a:avLst/>
@@ -3665,11 +3674,11 @@
           <a:p>
             <a:pPr algn="l">
               <a:lnSpc>
-                <a:spcPct val="140000"/>
+                <a:spcPts val="3500"/>
               </a:lnSpc>
             </a:pPr>
             <a:r>
-              <a:rPr sz="2100" i="0" b="0">
+              <a:rPr sz="2500" i="0" b="0">
                 <a:solidFill>
                   <a:srgbClr val="6B6B66"/>
                 </a:solidFill>
@@ -3688,8 +3697,8 @@
         </p:nvSpPr>
         <p:spPr>
           <a:xfrm>
-            <a:off x="7818120" y="7026341"/>
-            <a:ext cx="9601200" cy="554431"/>
+            <a:off x="7818120" y="6975348"/>
+            <a:ext cx="9601200" cy="535940"/>
           </a:xfrm>
           <a:prstGeom prst="rect">
             <a:avLst/>
@@ -3704,11 +3713,11 @@
           <a:p>
             <a:pPr algn="l">
               <a:lnSpc>
-                <a:spcPct val="140000"/>
+                <a:spcPts val="3500"/>
               </a:lnSpc>
             </a:pPr>
             <a:r>
-              <a:rPr sz="2100" i="0" b="0">
+              <a:rPr sz="2500" i="0" b="0">
                 <a:solidFill>
                   <a:srgbClr val="6B6B66"/>
                 </a:solidFill>
@@ -3825,8 +3834,8 @@
         </p:nvSpPr>
         <p:spPr>
           <a:xfrm>
-            <a:off x="2011680" y="2816687"/>
-            <a:ext cx="14264640" cy="882396"/>
+            <a:off x="2011680" y="2997581"/>
+            <a:ext cx="14264640" cy="1005078"/>
           </a:xfrm>
           <a:prstGeom prst="rect">
             <a:avLst/>
@@ -3841,7 +3850,7 @@
           <a:p>
             <a:pPr algn="l">
               <a:lnSpc>
-                <a:spcPct val="114000"/>
+                <a:spcPts val="5754"/>
               </a:lnSpc>
             </a:pPr>
             <a:r>
@@ -3849,9 +3858,18 @@
                 <a:solidFill>
                   <a:srgbClr val="1C1C1A"/>
                 </a:solidFill>
+                <a:latin typeface="Outfit 1 Bold"/>
+              </a:rPr>
+              <a:t>UMA NOVA</a:t>
+            </a:r>
+            <a:r>
+              <a:rPr sz="4200" i="0" b="0">
+                <a:solidFill>
+                  <a:srgbClr val="1C1C1A"/>
+                </a:solidFill>
                 <a:latin typeface="Outfit 1 Light"/>
               </a:rPr>
-              <a:t>UMA NOVA ETAPA EXIGE UMA NOVA ESTRUTURA</a:t>
+              <a:t> ETAPA EXIGE UMA NOVA ESTRUTURA</a:t>
             </a:r>
           </a:p>
         </p:txBody>
@@ -3864,14 +3882,14 @@
         </p:nvSpPr>
         <p:spPr>
           <a:xfrm>
-            <a:off x="2011680" y="3753581"/>
+            <a:off x="2011680" y="3911219"/>
             <a:ext cx="14264640" cy="10973"/>
           </a:xfrm>
           <a:prstGeom prst="rect">
             <a:avLst/>
           </a:prstGeom>
           <a:solidFill>
-            <a:srgbClr val="DFDDD7"/>
+            <a:srgbClr val="A5A49F"/>
           </a:solidFill>
           <a:ln>
             <a:noFill/>
@@ -3908,8 +3926,8 @@
         </p:nvSpPr>
         <p:spPr>
           <a:xfrm>
-            <a:off x="2011680" y="4101053"/>
-            <a:ext cx="12252960" cy="620573"/>
+            <a:off x="2011680" y="4258691"/>
+            <a:ext cx="12252960" cy="535940"/>
           </a:xfrm>
           <a:prstGeom prst="rect">
             <a:avLst/>
@@ -3924,11 +3942,11 @@
           <a:p>
             <a:pPr algn="l">
               <a:lnSpc>
-                <a:spcPct val="140000"/>
+                <a:spcPts val="3500"/>
               </a:lnSpc>
             </a:pPr>
             <a:r>
-              <a:rPr sz="2400" i="0" b="0">
+              <a:rPr sz="2500" i="0" b="0">
                 <a:solidFill>
                   <a:srgbClr val="6B6B66"/>
                 </a:solidFill>
@@ -3947,8 +3965,8 @@
         </p:nvSpPr>
         <p:spPr>
           <a:xfrm>
-            <a:off x="2011680" y="4959370"/>
-            <a:ext cx="12252960" cy="620573"/>
+            <a:off x="2011680" y="5032375"/>
+            <a:ext cx="12252960" cy="535940"/>
           </a:xfrm>
           <a:prstGeom prst="rect">
             <a:avLst/>
@@ -3963,11 +3981,11 @@
           <a:p>
             <a:pPr algn="l">
               <a:lnSpc>
-                <a:spcPct val="140000"/>
+                <a:spcPts val="3500"/>
               </a:lnSpc>
             </a:pPr>
             <a:r>
-              <a:rPr sz="2400" i="0" b="0">
+              <a:rPr sz="2500" i="0" b="0">
                 <a:solidFill>
                   <a:srgbClr val="6B6B66"/>
                 </a:solidFill>
@@ -3986,8 +4004,8 @@
         </p:nvSpPr>
         <p:spPr>
           <a:xfrm>
-            <a:off x="2011680" y="5817687"/>
-            <a:ext cx="12252960" cy="1149706"/>
+            <a:off x="2011680" y="5806059"/>
+            <a:ext cx="12252960" cy="980440"/>
           </a:xfrm>
           <a:prstGeom prst="rect">
             <a:avLst/>
@@ -4002,11 +4020,11 @@
           <a:p>
             <a:pPr algn="l">
               <a:lnSpc>
-                <a:spcPct val="140000"/>
+                <a:spcPts val="3500"/>
               </a:lnSpc>
             </a:pPr>
             <a:r>
-              <a:rPr sz="2400" i="0" b="0">
+              <a:rPr sz="2500" i="0" b="0">
                 <a:solidFill>
                   <a:srgbClr val="6B6B66"/>
                 </a:solidFill>
@@ -4121,14 +4139,14 @@
         </p:nvSpPr>
         <p:spPr>
           <a:xfrm>
-            <a:off x="594360" y="4010101"/>
+            <a:off x="594360" y="4037838"/>
             <a:ext cx="1188720" cy="27432"/>
           </a:xfrm>
           <a:prstGeom prst="rect">
             <a:avLst/>
           </a:prstGeom>
           <a:solidFill>
-            <a:srgbClr val="A9724A"/>
+            <a:srgbClr val="CC754E"/>
           </a:solidFill>
           <a:ln>
             <a:noFill/>
@@ -4165,7 +4183,7 @@
         </p:nvSpPr>
         <p:spPr>
           <a:xfrm>
-            <a:off x="594360" y="4320997"/>
+            <a:off x="594360" y="4348734"/>
             <a:ext cx="5760720" cy="292608"/>
           </a:xfrm>
           <a:prstGeom prst="rect">
@@ -4181,13 +4199,13 @@
           <a:p>
             <a:pPr algn="l">
               <a:lnSpc>
-                <a:spcPct val="140000"/>
+                <a:spcPts val="1959"/>
               </a:lnSpc>
             </a:pPr>
             <a:r>
               <a:rPr sz="1400" i="0" b="0" spc="300">
                 <a:solidFill>
-                  <a:srgbClr val="A9724A"/>
+                  <a:srgbClr val="CC754E"/>
                 </a:solidFill>
                 <a:latin typeface="Outfit 1 Semi-Bold"/>
               </a:rPr>
@@ -4204,8 +4222,8 @@
         </p:nvSpPr>
         <p:spPr>
           <a:xfrm>
-            <a:off x="594360" y="4887925"/>
-            <a:ext cx="5760720" cy="1480414"/>
+            <a:off x="594360" y="4915662"/>
+            <a:ext cx="5760720" cy="1424940"/>
           </a:xfrm>
           <a:prstGeom prst="rect">
             <a:avLst/>
@@ -4220,11 +4238,11 @@
           <a:p>
             <a:pPr algn="l">
               <a:lnSpc>
-                <a:spcPct val="140000"/>
+                <a:spcPts val="3500"/>
               </a:lnSpc>
             </a:pPr>
             <a:r>
-              <a:rPr sz="2100" i="0" b="0">
+              <a:rPr sz="2500" i="0" b="0">
                 <a:solidFill>
                   <a:srgbClr val="6B6B66"/>
                 </a:solidFill>
@@ -4287,8 +4305,8 @@
         </p:nvSpPr>
         <p:spPr>
           <a:xfrm>
-            <a:off x="7818120" y="2477628"/>
-            <a:ext cx="9601200" cy="882396"/>
+            <a:off x="7818120" y="2331720"/>
+            <a:ext cx="9601200" cy="1005078"/>
           </a:xfrm>
           <a:prstGeom prst="rect">
             <a:avLst/>
@@ -4303,7 +4321,7 @@
           <a:p>
             <a:pPr algn="l">
               <a:lnSpc>
-                <a:spcPct val="114000"/>
+                <a:spcPts val="5754"/>
               </a:lnSpc>
             </a:pPr>
             <a:r>
@@ -4311,9 +4329,18 @@
                 <a:solidFill>
                   <a:srgbClr val="1C1C1A"/>
                 </a:solidFill>
+                <a:latin typeface="Outfit 1 Bold"/>
+              </a:rPr>
+              <a:t>ELANDI,</a:t>
+            </a:r>
+            <a:r>
+              <a:rPr sz="4200" i="0" b="0">
+                <a:solidFill>
+                  <a:srgbClr val="1C1C1A"/>
+                </a:solidFill>
                 <a:latin typeface="Outfit 1 Light"/>
               </a:rPr>
-              <a:t>ELANDI, UMA TRAJETÓRIA DE GESTÃO</a:t>
+              <a:t> UMA TRAJETÓRIA DE GESTÃO</a:t>
             </a:r>
           </a:p>
         </p:txBody>
@@ -4326,14 +4353,14 @@
         </p:nvSpPr>
         <p:spPr>
           <a:xfrm>
-            <a:off x="7818120" y="4168536"/>
+            <a:off x="7818120" y="3976116"/>
             <a:ext cx="9601200" cy="10973"/>
           </a:xfrm>
           <a:prstGeom prst="rect">
             <a:avLst/>
           </a:prstGeom>
           <a:solidFill>
-            <a:srgbClr val="DFDDD7"/>
+            <a:srgbClr val="A5A49F"/>
           </a:solidFill>
           <a:ln>
             <a:noFill/>
@@ -4370,8 +4397,8 @@
         </p:nvSpPr>
         <p:spPr>
           <a:xfrm>
-            <a:off x="7818120" y="4516008"/>
-            <a:ext cx="9601200" cy="554431"/>
+            <a:off x="7818120" y="4323588"/>
+            <a:ext cx="9601200" cy="535940"/>
           </a:xfrm>
           <a:prstGeom prst="rect">
             <a:avLst/>
@@ -4386,11 +4413,11 @@
           <a:p>
             <a:pPr algn="l">
               <a:lnSpc>
-                <a:spcPct val="140000"/>
+                <a:spcPts val="3500"/>
               </a:lnSpc>
             </a:pPr>
             <a:r>
-              <a:rPr sz="2100" i="0" b="0">
+              <a:rPr sz="2500" i="0" b="0">
                 <a:solidFill>
                   <a:srgbClr val="6B6B66"/>
                 </a:solidFill>
@@ -4409,8 +4436,8 @@
         </p:nvSpPr>
         <p:spPr>
           <a:xfrm>
-            <a:off x="7818120" y="5308184"/>
-            <a:ext cx="9601200" cy="1017422"/>
+            <a:off x="7818120" y="5097272"/>
+            <a:ext cx="9601200" cy="1424940"/>
           </a:xfrm>
           <a:prstGeom prst="rect">
             <a:avLst/>
@@ -4425,11 +4452,11 @@
           <a:p>
             <a:pPr algn="l">
               <a:lnSpc>
-                <a:spcPct val="140000"/>
+                <a:spcPts val="3500"/>
               </a:lnSpc>
             </a:pPr>
             <a:r>
-              <a:rPr sz="2100" i="0" b="0">
+              <a:rPr sz="2500" i="0" b="0">
                 <a:solidFill>
                   <a:srgbClr val="6B6B66"/>
                 </a:solidFill>
@@ -4448,8 +4475,8 @@
         </p:nvSpPr>
         <p:spPr>
           <a:xfrm>
-            <a:off x="7818120" y="6563350"/>
-            <a:ext cx="9601200" cy="1017422"/>
+            <a:off x="7818120" y="6759956"/>
+            <a:ext cx="9601200" cy="980440"/>
           </a:xfrm>
           <a:prstGeom prst="rect">
             <a:avLst/>
@@ -4464,11 +4491,11 @@
           <a:p>
             <a:pPr algn="l">
               <a:lnSpc>
-                <a:spcPct val="140000"/>
+                <a:spcPts val="3500"/>
               </a:lnSpc>
             </a:pPr>
             <a:r>
-              <a:rPr sz="2100" i="0" b="0">
+              <a:rPr sz="2500" i="0" b="0">
                 <a:solidFill>
                   <a:srgbClr val="6B6B66"/>
                 </a:solidFill>
@@ -4586,7 +4613,7 @@
         <p:spPr>
           <a:xfrm>
             <a:off x="2011680" y="1723644"/>
-            <a:ext cx="14264640" cy="882396"/>
+            <a:ext cx="14264640" cy="1005078"/>
           </a:xfrm>
           <a:prstGeom prst="rect">
             <a:avLst/>
@@ -4601,7 +4628,7 @@
           <a:p>
             <a:pPr algn="l">
               <a:lnSpc>
-                <a:spcPct val="114000"/>
+                <a:spcPts val="5754"/>
               </a:lnSpc>
             </a:pPr>
             <a:r>
@@ -4611,7 +4638,25 @@
                 </a:solidFill>
                 <a:latin typeface="Outfit 1 Light"/>
               </a:rPr>
-              <a:t>A ESSÊNCIA PROFISSIONAL DE ELANDI</a:t>
+              <a:t>A </a:t>
+            </a:r>
+            <a:r>
+              <a:rPr sz="4200" i="0" b="0">
+                <a:solidFill>
+                  <a:srgbClr val="1C1C1A"/>
+                </a:solidFill>
+                <a:latin typeface="Outfit 1 Bold"/>
+              </a:rPr>
+              <a:t>ESSÊNCIA</a:t>
+            </a:r>
+            <a:r>
+              <a:rPr sz="4200" i="0" b="0">
+                <a:solidFill>
+                  <a:srgbClr val="1C1C1A"/>
+                </a:solidFill>
+                <a:latin typeface="Outfit 1 Light"/>
+              </a:rPr>
+              <a:t> PROFISSIONAL DE ELANDI</a:t>
             </a:r>
           </a:p>
         </p:txBody>
@@ -4624,14 +4669,14 @@
         </p:nvSpPr>
         <p:spPr>
           <a:xfrm>
-            <a:off x="2011680" y="2660538"/>
+            <a:off x="2011680" y="2637282"/>
             <a:ext cx="14264640" cy="10973"/>
           </a:xfrm>
           <a:prstGeom prst="rect">
             <a:avLst/>
           </a:prstGeom>
           <a:solidFill>
-            <a:srgbClr val="DFDDD7"/>
+            <a:srgbClr val="A5A49F"/>
           </a:solidFill>
           <a:ln>
             <a:noFill/>
@@ -4675,7 +4720,7 @@
             <a:avLst/>
           </a:prstGeom>
           <a:solidFill>
-            <a:srgbClr val="DFDDD7"/>
+            <a:srgbClr val="A5A49F"/>
           </a:solidFill>
           <a:ln>
             <a:noFill/>
@@ -4712,8 +4757,8 @@
         </p:nvSpPr>
         <p:spPr>
           <a:xfrm>
-            <a:off x="2011680" y="3470148"/>
-            <a:ext cx="4754880" cy="256032"/>
+            <a:off x="2011680" y="3506724"/>
+            <a:ext cx="4754880" cy="365760"/>
           </a:xfrm>
           <a:prstGeom prst="rect">
             <a:avLst/>
@@ -4728,13 +4773,13 @@
           <a:p>
             <a:pPr algn="l">
               <a:lnSpc>
-                <a:spcPct val="140000"/>
+                <a:spcPts val="2520"/>
               </a:lnSpc>
             </a:pPr>
             <a:r>
-              <a:rPr sz="1400" i="0" b="0" spc="220">
-                <a:solidFill>
-                  <a:srgbClr val="A5A49F"/>
+              <a:rPr sz="1800" i="0" b="0" spc="282">
+                <a:solidFill>
+                  <a:srgbClr val="1C1C1A"/>
                 </a:solidFill>
                 <a:latin typeface="Outfit 1 Semi-Bold"/>
               </a:rPr>
@@ -4751,8 +4796,8 @@
         </p:nvSpPr>
         <p:spPr>
           <a:xfrm>
-            <a:off x="7132320" y="3396996"/>
-            <a:ext cx="9144000" cy="962406"/>
+            <a:off x="7132320" y="3433572"/>
+            <a:ext cx="9144000" cy="925830"/>
           </a:xfrm>
           <a:prstGeom prst="rect">
             <a:avLst/>
@@ -4767,11 +4812,11 @@
           <a:p>
             <a:pPr algn="l">
               <a:lnSpc>
-                <a:spcPct val="140000"/>
+                <a:spcPts val="3500"/>
               </a:lnSpc>
             </a:pPr>
             <a:r>
-              <a:rPr sz="2400" i="0" b="0">
+              <a:rPr sz="2500" i="0" b="0">
                 <a:solidFill>
                   <a:srgbClr val="1C1C1A"/>
                 </a:solidFill>
@@ -4797,7 +4842,7 @@
             <a:avLst/>
           </a:prstGeom>
           <a:solidFill>
-            <a:srgbClr val="DFDDD7"/>
+            <a:srgbClr val="A5A49F"/>
           </a:solidFill>
           <a:ln>
             <a:noFill/>
@@ -4834,8 +4879,8 @@
         </p:nvSpPr>
         <p:spPr>
           <a:xfrm>
-            <a:off x="2011680" y="4670298"/>
-            <a:ext cx="4754880" cy="256032"/>
+            <a:off x="2011680" y="4706874"/>
+            <a:ext cx="4754880" cy="365760"/>
           </a:xfrm>
           <a:prstGeom prst="rect">
             <a:avLst/>
@@ -4850,13 +4895,13 @@
           <a:p>
             <a:pPr algn="l">
               <a:lnSpc>
-                <a:spcPct val="140000"/>
+                <a:spcPts val="2520"/>
               </a:lnSpc>
             </a:pPr>
             <a:r>
-              <a:rPr sz="1400" i="0" b="0" spc="220">
-                <a:solidFill>
-                  <a:srgbClr val="A5A49F"/>
+              <a:rPr sz="1800" i="0" b="0" spc="282">
+                <a:solidFill>
+                  <a:srgbClr val="1C1C1A"/>
                 </a:solidFill>
                 <a:latin typeface="Outfit 1 Semi-Bold"/>
               </a:rPr>
@@ -4873,8 +4918,8 @@
         </p:nvSpPr>
         <p:spPr>
           <a:xfrm>
-            <a:off x="7132320" y="4597146"/>
-            <a:ext cx="9144000" cy="962406"/>
+            <a:off x="7132320" y="4633722"/>
+            <a:ext cx="9144000" cy="925830"/>
           </a:xfrm>
           <a:prstGeom prst="rect">
             <a:avLst/>
@@ -4889,11 +4934,11 @@
           <a:p>
             <a:pPr algn="l">
               <a:lnSpc>
-                <a:spcPct val="140000"/>
+                <a:spcPts val="3500"/>
               </a:lnSpc>
             </a:pPr>
             <a:r>
-              <a:rPr sz="2400" i="0" b="0">
+              <a:rPr sz="2500" i="0" b="0">
                 <a:solidFill>
                   <a:srgbClr val="1C1C1A"/>
                 </a:solidFill>
@@ -4919,7 +4964,7 @@
             <a:avLst/>
           </a:prstGeom>
           <a:solidFill>
-            <a:srgbClr val="DFDDD7"/>
+            <a:srgbClr val="A5A49F"/>
           </a:solidFill>
           <a:ln>
             <a:noFill/>
@@ -4956,8 +5001,8 @@
         </p:nvSpPr>
         <p:spPr>
           <a:xfrm>
-            <a:off x="2011680" y="5870448"/>
-            <a:ext cx="4754880" cy="256032"/>
+            <a:off x="2011680" y="5907024"/>
+            <a:ext cx="4754880" cy="365760"/>
           </a:xfrm>
           <a:prstGeom prst="rect">
             <a:avLst/>
@@ -4972,13 +5017,13 @@
           <a:p>
             <a:pPr algn="l">
               <a:lnSpc>
-                <a:spcPct val="140000"/>
+                <a:spcPts val="2520"/>
               </a:lnSpc>
             </a:pPr>
             <a:r>
-              <a:rPr sz="1400" i="0" b="0" spc="220">
-                <a:solidFill>
-                  <a:srgbClr val="A5A49F"/>
+              <a:rPr sz="1800" i="0" b="0" spc="282">
+                <a:solidFill>
+                  <a:srgbClr val="1C1C1A"/>
                 </a:solidFill>
                 <a:latin typeface="Outfit 1 Semi-Bold"/>
               </a:rPr>
@@ -4995,8 +5040,8 @@
         </p:nvSpPr>
         <p:spPr>
           <a:xfrm>
-            <a:off x="7132320" y="5797296"/>
-            <a:ext cx="9144000" cy="962406"/>
+            <a:off x="7132320" y="5833872"/>
+            <a:ext cx="9144000" cy="925830"/>
           </a:xfrm>
           <a:prstGeom prst="rect">
             <a:avLst/>
@@ -5011,11 +5056,11 @@
           <a:p>
             <a:pPr algn="l">
               <a:lnSpc>
-                <a:spcPct val="140000"/>
+                <a:spcPts val="3500"/>
               </a:lnSpc>
             </a:pPr>
             <a:r>
-              <a:rPr sz="2400" i="0" b="0">
+              <a:rPr sz="2500" i="0" b="0">
                 <a:solidFill>
                   <a:srgbClr val="1C1C1A"/>
                 </a:solidFill>
@@ -5041,7 +5086,7 @@
             <a:avLst/>
           </a:prstGeom>
           <a:solidFill>
-            <a:srgbClr val="DFDDD7"/>
+            <a:srgbClr val="A5A49F"/>
           </a:solidFill>
           <a:ln>
             <a:noFill/>
@@ -5078,8 +5123,8 @@
         </p:nvSpPr>
         <p:spPr>
           <a:xfrm>
-            <a:off x="2011680" y="7070598"/>
-            <a:ext cx="4754880" cy="256032"/>
+            <a:off x="2011680" y="7107174"/>
+            <a:ext cx="4754880" cy="365760"/>
           </a:xfrm>
           <a:prstGeom prst="rect">
             <a:avLst/>
@@ -5094,13 +5139,13 @@
           <a:p>
             <a:pPr algn="l">
               <a:lnSpc>
-                <a:spcPct val="140000"/>
+                <a:spcPts val="2520"/>
               </a:lnSpc>
             </a:pPr>
             <a:r>
-              <a:rPr sz="1400" i="0" b="0" spc="220">
-                <a:solidFill>
-                  <a:srgbClr val="A9724A"/>
+              <a:rPr sz="1800" i="0" b="0" spc="282">
+                <a:solidFill>
+                  <a:srgbClr val="CC754E"/>
                 </a:solidFill>
                 <a:latin typeface="Outfit 1 Semi-Bold"/>
               </a:rPr>
@@ -5117,8 +5162,8 @@
         </p:nvSpPr>
         <p:spPr>
           <a:xfrm>
-            <a:off x="7132320" y="6997446"/>
-            <a:ext cx="9144000" cy="962406"/>
+            <a:off x="7132320" y="7034022"/>
+            <a:ext cx="9144000" cy="925830"/>
           </a:xfrm>
           <a:prstGeom prst="rect">
             <a:avLst/>
@@ -5133,11 +5178,11 @@
           <a:p>
             <a:pPr algn="l">
               <a:lnSpc>
-                <a:spcPct val="140000"/>
+                <a:spcPts val="3500"/>
               </a:lnSpc>
             </a:pPr>
             <a:r>
-              <a:rPr sz="2400" i="0" b="0">
+              <a:rPr sz="2500" i="0" b="0">
                 <a:solidFill>
                   <a:srgbClr val="1C1C1A"/>
                 </a:solidFill>
@@ -5163,7 +5208,7 @@
             <a:avLst/>
           </a:prstGeom>
           <a:solidFill>
-            <a:srgbClr val="A9724A"/>
+            <a:srgbClr val="CC754E"/>
           </a:solidFill>
           <a:ln>
             <a:noFill/>
@@ -5298,8 +5343,8 @@
         </p:nvSpPr>
         <p:spPr>
           <a:xfrm>
-            <a:off x="2011680" y="2552120"/>
-            <a:ext cx="14264640" cy="882396"/>
+            <a:off x="2011680" y="2775331"/>
+            <a:ext cx="14264640" cy="1005078"/>
           </a:xfrm>
           <a:prstGeom prst="rect">
             <a:avLst/>
@@ -5314,7 +5359,7 @@
           <a:p>
             <a:pPr algn="l">
               <a:lnSpc>
-                <a:spcPct val="114000"/>
+                <a:spcPts val="5754"/>
               </a:lnSpc>
             </a:pPr>
             <a:r>
@@ -5324,7 +5369,16 @@
                 </a:solidFill>
                 <a:latin typeface="Outfit 1 Light"/>
               </a:rPr>
-              <a:t>O OLHAR DE QUEM COMPREENDE A COMPLEXIDADE</a:t>
+              <a:t>O OLHAR DE QUEM </a:t>
+            </a:r>
+            <a:r>
+              <a:rPr sz="4200" i="0" b="0">
+                <a:solidFill>
+                  <a:srgbClr val="1C1C1A"/>
+                </a:solidFill>
+                <a:latin typeface="Outfit 1 Bold"/>
+              </a:rPr>
+              <a:t>COMPREENDE A COMPLEXIDADE</a:t>
             </a:r>
           </a:p>
         </p:txBody>
@@ -5337,14 +5391,14 @@
         </p:nvSpPr>
         <p:spPr>
           <a:xfrm>
-            <a:off x="2011680" y="3489014"/>
+            <a:off x="2011680" y="3688969"/>
             <a:ext cx="14264640" cy="10973"/>
           </a:xfrm>
           <a:prstGeom prst="rect">
             <a:avLst/>
           </a:prstGeom>
           <a:solidFill>
-            <a:srgbClr val="DFDDD7"/>
+            <a:srgbClr val="A5A49F"/>
           </a:solidFill>
           <a:ln>
             <a:noFill/>
@@ -5381,8 +5435,8 @@
         </p:nvSpPr>
         <p:spPr>
           <a:xfrm>
-            <a:off x="2011680" y="3836486"/>
-            <a:ext cx="12252960" cy="1149706"/>
+            <a:off x="2011680" y="4036441"/>
+            <a:ext cx="12252960" cy="980440"/>
           </a:xfrm>
           <a:prstGeom prst="rect">
             <a:avLst/>
@@ -5397,11 +5451,11 @@
           <a:p>
             <a:pPr algn="l">
               <a:lnSpc>
-                <a:spcPct val="140000"/>
+                <a:spcPts val="3500"/>
               </a:lnSpc>
             </a:pPr>
             <a:r>
-              <a:rPr sz="2400" i="0" b="0">
+              <a:rPr sz="2500" i="0" b="0">
                 <a:solidFill>
                   <a:srgbClr val="6B6B66"/>
                 </a:solidFill>
@@ -5420,8 +5474,8 @@
         </p:nvSpPr>
         <p:spPr>
           <a:xfrm>
-            <a:off x="2011680" y="5223936"/>
-            <a:ext cx="12252960" cy="620573"/>
+            <a:off x="2011680" y="5254625"/>
+            <a:ext cx="12252960" cy="535940"/>
           </a:xfrm>
           <a:prstGeom prst="rect">
             <a:avLst/>
@@ -5436,11 +5490,11 @@
           <a:p>
             <a:pPr algn="l">
               <a:lnSpc>
-                <a:spcPct val="140000"/>
+                <a:spcPts val="3500"/>
               </a:lnSpc>
             </a:pPr>
             <a:r>
-              <a:rPr sz="2400" i="0" b="0">
+              <a:rPr sz="2500" i="0" b="0">
                 <a:solidFill>
                   <a:srgbClr val="6B6B66"/>
                 </a:solidFill>
@@ -5459,8 +5513,8 @@
         </p:nvSpPr>
         <p:spPr>
           <a:xfrm>
-            <a:off x="2011680" y="6082253"/>
-            <a:ext cx="12252960" cy="1149706"/>
+            <a:off x="2011680" y="6028309"/>
+            <a:ext cx="12252960" cy="980440"/>
           </a:xfrm>
           <a:prstGeom prst="rect">
             <a:avLst/>
@@ -5475,11 +5529,11 @@
           <a:p>
             <a:pPr algn="l">
               <a:lnSpc>
-                <a:spcPct val="140000"/>
+                <a:spcPts val="3500"/>
               </a:lnSpc>
             </a:pPr>
             <a:r>
-              <a:rPr sz="2400" i="0" b="0">
+              <a:rPr sz="2500" i="0" b="0">
                 <a:solidFill>
                   <a:srgbClr val="6B6B66"/>
                 </a:solidFill>
@@ -5596,8 +5650,8 @@
         </p:nvSpPr>
         <p:spPr>
           <a:xfrm>
-            <a:off x="2011680" y="2816687"/>
-            <a:ext cx="14264640" cy="882396"/>
+            <a:off x="2011680" y="2997581"/>
+            <a:ext cx="14264640" cy="1005078"/>
           </a:xfrm>
           <a:prstGeom prst="rect">
             <a:avLst/>
@@ -5612,7 +5666,7 @@
           <a:p>
             <a:pPr algn="l">
               <a:lnSpc>
-                <a:spcPct val="114000"/>
+                <a:spcPts val="5754"/>
               </a:lnSpc>
             </a:pPr>
             <a:r>
@@ -5622,7 +5676,16 @@
                 </a:solidFill>
                 <a:latin typeface="Outfit 1 Light"/>
               </a:rPr>
-              <a:t>UM OLHAR QUE VAI ALÉM DOS NÚMEROS</a:t>
+              <a:t>UM OLHAR QUE VAI </a:t>
+            </a:r>
+            <a:r>
+              <a:rPr sz="4200" i="0" b="0">
+                <a:solidFill>
+                  <a:srgbClr val="1C1C1A"/>
+                </a:solidFill>
+                <a:latin typeface="Outfit 1 Bold"/>
+              </a:rPr>
+              <a:t>ALÉM DOS NÚMEROS</a:t>
             </a:r>
           </a:p>
         </p:txBody>
@@ -5635,14 +5698,14 @@
         </p:nvSpPr>
         <p:spPr>
           <a:xfrm>
-            <a:off x="2011680" y="3753581"/>
+            <a:off x="2011680" y="3911219"/>
             <a:ext cx="14264640" cy="10973"/>
           </a:xfrm>
           <a:prstGeom prst="rect">
             <a:avLst/>
           </a:prstGeom>
           <a:solidFill>
-            <a:srgbClr val="DFDDD7"/>
+            <a:srgbClr val="A5A49F"/>
           </a:solidFill>
           <a:ln>
             <a:noFill/>
@@ -5679,8 +5742,8 @@
         </p:nvSpPr>
         <p:spPr>
           <a:xfrm>
-            <a:off x="2011680" y="4101053"/>
-            <a:ext cx="12252960" cy="620573"/>
+            <a:off x="2011680" y="4258691"/>
+            <a:ext cx="12252960" cy="535940"/>
           </a:xfrm>
           <a:prstGeom prst="rect">
             <a:avLst/>
@@ -5695,11 +5758,11 @@
           <a:p>
             <a:pPr algn="l">
               <a:lnSpc>
-                <a:spcPct val="140000"/>
+                <a:spcPts val="3500"/>
               </a:lnSpc>
             </a:pPr>
             <a:r>
-              <a:rPr sz="2400" i="0" b="0">
+              <a:rPr sz="2500" i="0" b="0">
                 <a:solidFill>
                   <a:srgbClr val="6B6B66"/>
                 </a:solidFill>
@@ -5718,8 +5781,8 @@
         </p:nvSpPr>
         <p:spPr>
           <a:xfrm>
-            <a:off x="2011680" y="4959370"/>
-            <a:ext cx="12252960" cy="1149706"/>
+            <a:off x="2011680" y="5032375"/>
+            <a:ext cx="12252960" cy="980440"/>
           </a:xfrm>
           <a:prstGeom prst="rect">
             <a:avLst/>
@@ -5734,11 +5797,11 @@
           <a:p>
             <a:pPr algn="l">
               <a:lnSpc>
-                <a:spcPct val="140000"/>
+                <a:spcPts val="3500"/>
               </a:lnSpc>
             </a:pPr>
             <a:r>
-              <a:rPr sz="2400" i="0" b="0">
+              <a:rPr sz="2500" i="0" b="0">
                 <a:solidFill>
                   <a:srgbClr val="6B6B66"/>
                 </a:solidFill>
@@ -5757,8 +5820,8 @@
         </p:nvSpPr>
         <p:spPr>
           <a:xfrm>
-            <a:off x="2011680" y="6346820"/>
-            <a:ext cx="12252960" cy="620573"/>
+            <a:off x="2011680" y="6250559"/>
+            <a:ext cx="12252960" cy="535940"/>
           </a:xfrm>
           <a:prstGeom prst="rect">
             <a:avLst/>
@@ -5773,11 +5836,11 @@
           <a:p>
             <a:pPr algn="l">
               <a:lnSpc>
-                <a:spcPct val="140000"/>
+                <a:spcPts val="3500"/>
               </a:lnSpc>
             </a:pPr>
             <a:r>
-              <a:rPr sz="2400" i="0" b="0">
+              <a:rPr sz="2500" i="0" b="0">
                 <a:solidFill>
                   <a:srgbClr val="6B6B66"/>
                 </a:solidFill>
@@ -5894,8 +5957,8 @@
         </p:nvSpPr>
         <p:spPr>
           <a:xfrm>
-            <a:off x="2011680" y="2816687"/>
-            <a:ext cx="14264640" cy="882396"/>
+            <a:off x="2011680" y="2997581"/>
+            <a:ext cx="14264640" cy="1005078"/>
           </a:xfrm>
           <a:prstGeom prst="rect">
             <a:avLst/>
@@ -5910,7 +5973,7 @@
           <a:p>
             <a:pPr algn="l">
               <a:lnSpc>
-                <a:spcPct val="114000"/>
+                <a:spcPts val="5754"/>
               </a:lnSpc>
             </a:pPr>
             <a:r>
@@ -5920,7 +5983,16 @@
                 </a:solidFill>
                 <a:latin typeface="Outfit 1 Light"/>
               </a:rPr>
-              <a:t>RESPONSABILIDADE É CONSTRUIR CONTINUIDADE</a:t>
+              <a:t>RESPONSABILIDADE É </a:t>
+            </a:r>
+            <a:r>
+              <a:rPr sz="4200" i="0" b="0">
+                <a:solidFill>
+                  <a:srgbClr val="1C1C1A"/>
+                </a:solidFill>
+                <a:latin typeface="Outfit 1 Bold"/>
+              </a:rPr>
+              <a:t>CONSTRUIR CONTINUIDADE</a:t>
             </a:r>
           </a:p>
         </p:txBody>
@@ -5933,14 +6005,14 @@
         </p:nvSpPr>
         <p:spPr>
           <a:xfrm>
-            <a:off x="2011680" y="3753581"/>
+            <a:off x="2011680" y="3911219"/>
             <a:ext cx="14264640" cy="10973"/>
           </a:xfrm>
           <a:prstGeom prst="rect">
             <a:avLst/>
           </a:prstGeom>
           <a:solidFill>
-            <a:srgbClr val="DFDDD7"/>
+            <a:srgbClr val="A5A49F"/>
           </a:solidFill>
           <a:ln>
             <a:noFill/>
@@ -5977,8 +6049,8 @@
         </p:nvSpPr>
         <p:spPr>
           <a:xfrm>
-            <a:off x="2011680" y="4101053"/>
-            <a:ext cx="12252960" cy="1149706"/>
+            <a:off x="2011680" y="4258691"/>
+            <a:ext cx="12252960" cy="980440"/>
           </a:xfrm>
           <a:prstGeom prst="rect">
             <a:avLst/>
@@ -5993,11 +6065,11 @@
           <a:p>
             <a:pPr algn="l">
               <a:lnSpc>
-                <a:spcPct val="140000"/>
+                <a:spcPts val="3500"/>
               </a:lnSpc>
             </a:pPr>
             <a:r>
-              <a:rPr sz="2400" i="0" b="0">
+              <a:rPr sz="2500" i="0" b="0">
                 <a:solidFill>
                   <a:srgbClr val="6B6B66"/>
                 </a:solidFill>
@@ -6016,8 +6088,8 @@
         </p:nvSpPr>
         <p:spPr>
           <a:xfrm>
-            <a:off x="2011680" y="5488503"/>
-            <a:ext cx="12252960" cy="620573"/>
+            <a:off x="2011680" y="5476875"/>
+            <a:ext cx="12252960" cy="535940"/>
           </a:xfrm>
           <a:prstGeom prst="rect">
             <a:avLst/>
@@ -6032,11 +6104,11 @@
           <a:p>
             <a:pPr algn="l">
               <a:lnSpc>
-                <a:spcPct val="140000"/>
+                <a:spcPts val="3500"/>
               </a:lnSpc>
             </a:pPr>
             <a:r>
-              <a:rPr sz="2400" i="0" b="0">
+              <a:rPr sz="2500" i="0" b="0">
                 <a:solidFill>
                   <a:srgbClr val="6B6B66"/>
                 </a:solidFill>
@@ -6055,8 +6127,8 @@
         </p:nvSpPr>
         <p:spPr>
           <a:xfrm>
-            <a:off x="2011680" y="6346820"/>
-            <a:ext cx="12252960" cy="620573"/>
+            <a:off x="2011680" y="6250559"/>
+            <a:ext cx="12252960" cy="535940"/>
           </a:xfrm>
           <a:prstGeom prst="rect">
             <a:avLst/>
@@ -6071,11 +6143,11 @@
           <a:p>
             <a:pPr algn="l">
               <a:lnSpc>
-                <a:spcPct val="140000"/>
+                <a:spcPts val="3500"/>
               </a:lnSpc>
             </a:pPr>
             <a:r>
-              <a:rPr sz="2400" i="0" b="0">
+              <a:rPr sz="2500" i="0" b="0">
                 <a:solidFill>
                   <a:srgbClr val="6B6B66"/>
                 </a:solidFill>
@@ -6184,75 +6256,22 @@
       </p:sp>
       <p:sp>
         <p:nvSpPr>
-          <p:cNvPr id="4" name="TextBox 3"/>
-          <p:cNvSpPr txBox="1"/>
-          <p:nvPr/>
-        </p:nvSpPr>
-        <p:spPr>
-          <a:xfrm>
-            <a:off x="2011680" y="3383829"/>
-            <a:ext cx="14081760" cy="2734788"/>
-          </a:xfrm>
-          <a:prstGeom prst="rect">
-            <a:avLst/>
-          </a:prstGeom>
-          <a:noFill/>
-        </p:spPr>
-        <p:txBody>
-          <a:bodyPr wrap="square" anchor="t" lIns="0" rIns="0" tIns="0" bIns="0">
-            <a:spAutoFit/>
-          </a:bodyPr>
-          <a:lstStyle/>
-          <a:p>
-            <a:pPr algn="l">
-              <a:lnSpc>
-                <a:spcPct val="126000"/>
-              </a:lnSpc>
-            </a:pPr>
-            <a:r>
-              <a:rPr sz="6200" i="0" b="0">
-                <a:solidFill>
-                  <a:srgbClr val="FFFFFF"/>
-                </a:solidFill>
-                <a:latin typeface="Outfit 1 Light"/>
-              </a:rPr>
-              <a:t>“Eu tô bem preparado para não ser</a:t>
-            </a:r>
-          </a:p>
-          <a:p>
-            <a:pPr algn="l">
-              <a:lnSpc>
-                <a:spcPct val="126000"/>
-              </a:lnSpc>
-            </a:pPr>
-            <a:r>
-              <a:rPr sz="6200" i="0" b="0">
-                <a:solidFill>
-                  <a:srgbClr val="FFFFFF"/>
-                </a:solidFill>
-                <a:latin typeface="Outfit 1 Light"/>
-              </a:rPr>
-              <a:t>um obstáculo, e sim ser um agregador.”</a:t>
-            </a:r>
-          </a:p>
-        </p:txBody>
-      </p:sp>
-      <p:sp>
-        <p:nvSpPr>
-          <p:cNvPr id="5" name="Rectangle 4"/>
+          <p:cNvPr id="4" name="Rounded Rectangle 3"/>
           <p:cNvSpPr/>
           <p:nvPr/>
         </p:nvSpPr>
         <p:spPr>
           <a:xfrm>
-            <a:off x="2011680" y="5845821"/>
-            <a:ext cx="1188720" cy="27432"/>
-          </a:xfrm>
-          <a:prstGeom prst="rect">
-            <a:avLst/>
+            <a:off x="10479024" y="1028700"/>
+            <a:ext cx="7808976" cy="2553716"/>
+          </a:xfrm>
+          <a:prstGeom prst="roundRect">
+            <a:avLst>
+              <a:gd name="adj" fmla="val 6445"/>
+            </a:avLst>
           </a:prstGeom>
           <a:solidFill>
-            <a:srgbClr val="A9724A"/>
+            <a:srgbClr val="F8F7F2"/>
           </a:solidFill>
           <a:ln>
             <a:noFill/>
@@ -6283,14 +6302,14 @@
       </p:sp>
       <p:sp>
         <p:nvSpPr>
-          <p:cNvPr id="6" name="TextBox 5"/>
+          <p:cNvPr id="5" name="TextBox 4"/>
           <p:cNvSpPr txBox="1"/>
           <p:nvPr/>
         </p:nvSpPr>
         <p:spPr>
           <a:xfrm>
-            <a:off x="2011680" y="6120141"/>
-            <a:ext cx="11887200" cy="554431"/>
+            <a:off x="11045952" y="1595628"/>
+            <a:ext cx="6675120" cy="1062736"/>
           </a:xfrm>
           <a:prstGeom prst="rect">
             <a:avLst/>
@@ -6305,13 +6324,68 @@
           <a:p>
             <a:pPr algn="l">
               <a:lnSpc>
-                <a:spcPct val="140000"/>
+                <a:spcPts val="3752"/>
               </a:lnSpc>
             </a:pPr>
             <a:r>
-              <a:rPr sz="2100" i="0" b="0">
-                <a:solidFill>
-                  <a:srgbClr val="FFFFFF"/>
+              <a:rPr sz="2800" i="0" b="0">
+                <a:solidFill>
+                  <a:srgbClr val="1C1C1A"/>
+                </a:solidFill>
+                <a:latin typeface="Outfit 1 Light"/>
+              </a:rPr>
+              <a:t>“Eu tô bem preparado para não ser</a:t>
+            </a:r>
+          </a:p>
+          <a:p>
+            <a:pPr algn="l">
+              <a:lnSpc>
+                <a:spcPts val="3752"/>
+              </a:lnSpc>
+            </a:pPr>
+            <a:r>
+              <a:rPr sz="2800" i="0" b="0">
+                <a:solidFill>
+                  <a:srgbClr val="1C1C1A"/>
+                </a:solidFill>
+                <a:latin typeface="Outfit 1 Light"/>
+              </a:rPr>
+              <a:t>um obstáculo, e sim ser um agregador.”</a:t>
+            </a:r>
+          </a:p>
+        </p:txBody>
+      </p:sp>
+      <p:sp>
+        <p:nvSpPr>
+          <p:cNvPr id="6" name="TextBox 5"/>
+          <p:cNvSpPr txBox="1"/>
+          <p:nvPr/>
+        </p:nvSpPr>
+        <p:spPr>
+          <a:xfrm>
+            <a:off x="11045952" y="2713228"/>
+            <a:ext cx="6675120" cy="393700"/>
+          </a:xfrm>
+          <a:prstGeom prst="rect">
+            <a:avLst/>
+          </a:prstGeom>
+          <a:noFill/>
+        </p:spPr>
+        <p:txBody>
+          <a:bodyPr wrap="square" anchor="t" lIns="0" rIns="0" tIns="0" bIns="0">
+            <a:spAutoFit/>
+          </a:bodyPr>
+          <a:lstStyle/>
+          <a:p>
+            <a:pPr algn="l">
+              <a:lnSpc>
+                <a:spcPts val="2379"/>
+              </a:lnSpc>
+            </a:pPr>
+            <a:r>
+              <a:rPr sz="1700" i="0" b="0">
+                <a:solidFill>
+                  <a:srgbClr val="6B6B66"/>
                 </a:solidFill>
                 <a:latin typeface="Outfit 1 Light"/>
               </a:rPr>
@@ -6328,8 +6402,8 @@
         </p:nvSpPr>
         <p:spPr>
           <a:xfrm>
-            <a:off x="2011680" y="7845755"/>
-            <a:ext cx="11521440" cy="859333"/>
+            <a:off x="2011680" y="7990840"/>
+            <a:ext cx="11521440" cy="714248"/>
           </a:xfrm>
           <a:prstGeom prst="rect">
             <a:avLst/>
@@ -6474,8 +6548,8 @@
         </p:nvSpPr>
         <p:spPr>
           <a:xfrm>
-            <a:off x="2011680" y="3245845"/>
-            <a:ext cx="14264640" cy="882396"/>
+            <a:off x="2011680" y="3384423"/>
+            <a:ext cx="14264640" cy="1005078"/>
           </a:xfrm>
           <a:prstGeom prst="rect">
             <a:avLst/>
@@ -6490,7 +6564,7 @@
           <a:p>
             <a:pPr algn="l">
               <a:lnSpc>
-                <a:spcPct val="114000"/>
+                <a:spcPts val="5754"/>
               </a:lnSpc>
             </a:pPr>
             <a:r>
@@ -6500,7 +6574,16 @@
                 </a:solidFill>
                 <a:latin typeface="Outfit 1 Light"/>
               </a:rPr>
-              <a:t>A MATURIDADE DE QUEM SABE SOMAR</a:t>
+              <a:t>A MATURIDADE DE QUEM </a:t>
+            </a:r>
+            <a:r>
+              <a:rPr sz="4200" i="0" b="0">
+                <a:solidFill>
+                  <a:srgbClr val="1C1C1A"/>
+                </a:solidFill>
+                <a:latin typeface="Outfit 1 Bold"/>
+              </a:rPr>
+              <a:t>SABE SOMAR</a:t>
             </a:r>
           </a:p>
         </p:txBody>
@@ -6513,14 +6596,14 @@
         </p:nvSpPr>
         <p:spPr>
           <a:xfrm>
-            <a:off x="2011680" y="4182739"/>
+            <a:off x="2011680" y="4298061"/>
             <a:ext cx="14264640" cy="10973"/>
           </a:xfrm>
           <a:prstGeom prst="rect">
             <a:avLst/>
           </a:prstGeom>
           <a:solidFill>
-            <a:srgbClr val="DFDDD7"/>
+            <a:srgbClr val="A5A49F"/>
           </a:solidFill>
           <a:ln>
             <a:noFill/>
@@ -6557,8 +6640,8 @@
         </p:nvSpPr>
         <p:spPr>
           <a:xfrm>
-            <a:off x="2011680" y="4530211"/>
-            <a:ext cx="12252960" cy="620573"/>
+            <a:off x="2011680" y="4645533"/>
+            <a:ext cx="12252960" cy="535940"/>
           </a:xfrm>
           <a:prstGeom prst="rect">
             <a:avLst/>
@@ -6573,11 +6656,11 @@
           <a:p>
             <a:pPr algn="l">
               <a:lnSpc>
-                <a:spcPct val="140000"/>
+                <a:spcPts val="3500"/>
               </a:lnSpc>
             </a:pPr>
             <a:r>
-              <a:rPr sz="2400" i="0" b="0">
+              <a:rPr sz="2500" i="0" b="0">
                 <a:solidFill>
                   <a:srgbClr val="6B6B66"/>
                 </a:solidFill>
@@ -6596,8 +6679,8 @@
         </p:nvSpPr>
         <p:spPr>
           <a:xfrm>
-            <a:off x="2011680" y="5388528"/>
-            <a:ext cx="12252960" cy="1149706"/>
+            <a:off x="2011680" y="5419217"/>
+            <a:ext cx="12252960" cy="980440"/>
           </a:xfrm>
           <a:prstGeom prst="rect">
             <a:avLst/>
@@ -6612,11 +6695,11 @@
           <a:p>
             <a:pPr algn="l">
               <a:lnSpc>
-                <a:spcPct val="140000"/>
+                <a:spcPts val="3500"/>
               </a:lnSpc>
             </a:pPr>
             <a:r>
-              <a:rPr sz="2400" i="0" b="0">
+              <a:rPr sz="2500" i="0" b="0">
                 <a:solidFill>
                   <a:srgbClr val="6B6B66"/>
                 </a:solidFill>
@@ -6733,8 +6816,8 @@
         </p:nvSpPr>
         <p:spPr>
           <a:xfrm>
-            <a:off x="2011680" y="2553341"/>
-            <a:ext cx="14264640" cy="882396"/>
+            <a:off x="2011680" y="2491867"/>
+            <a:ext cx="14264640" cy="1005078"/>
           </a:xfrm>
           <a:prstGeom prst="rect">
             <a:avLst/>
@@ -6749,7 +6832,7 @@
           <a:p>
             <a:pPr algn="l">
               <a:lnSpc>
-                <a:spcPct val="114000"/>
+                <a:spcPts val="5754"/>
               </a:lnSpc>
             </a:pPr>
             <a:r>
@@ -6772,14 +6855,14 @@
         </p:nvSpPr>
         <p:spPr>
           <a:xfrm>
-            <a:off x="2011680" y="3490235"/>
+            <a:off x="2011680" y="3405505"/>
             <a:ext cx="14264640" cy="10973"/>
           </a:xfrm>
           <a:prstGeom prst="rect">
             <a:avLst/>
           </a:prstGeom>
           <a:solidFill>
-            <a:srgbClr val="DFDDD7"/>
+            <a:srgbClr val="A5A49F"/>
           </a:solidFill>
           <a:ln>
             <a:noFill/>
@@ -6816,14 +6899,14 @@
         </p:nvSpPr>
         <p:spPr>
           <a:xfrm>
-            <a:off x="2011680" y="3837707"/>
-            <a:ext cx="6880860" cy="10973"/>
+            <a:off x="2011680" y="3752977"/>
+            <a:ext cx="6880860" cy="56693"/>
           </a:xfrm>
           <a:prstGeom prst="rect">
             <a:avLst/>
           </a:prstGeom>
           <a:solidFill>
-            <a:srgbClr val="DFDDD7"/>
+            <a:srgbClr val="CC754E"/>
           </a:solidFill>
           <a:ln>
             <a:noFill/>
@@ -6860,8 +6943,8 @@
         </p:nvSpPr>
         <p:spPr>
           <a:xfrm>
-            <a:off x="2011680" y="4093739"/>
-            <a:ext cx="6880860" cy="526085"/>
+            <a:off x="2011680" y="4027297"/>
+            <a:ext cx="6880860" cy="535940"/>
           </a:xfrm>
           <a:prstGeom prst="rect">
             <a:avLst/>
@@ -6876,11 +6959,11 @@
           <a:p>
             <a:pPr algn="l">
               <a:lnSpc>
-                <a:spcPct val="140000"/>
+                <a:spcPts val="3500"/>
               </a:lnSpc>
             </a:pPr>
             <a:r>
-              <a:rPr sz="2300" i="0" b="0">
+              <a:rPr sz="2500" i="0" b="0">
                 <a:solidFill>
                   <a:srgbClr val="1C1C1A"/>
                 </a:solidFill>
@@ -6899,8 +6982,8 @@
         </p:nvSpPr>
         <p:spPr>
           <a:xfrm>
-            <a:off x="2011680" y="4784416"/>
-            <a:ext cx="6880860" cy="1017422"/>
+            <a:off x="2011680" y="4764405"/>
+            <a:ext cx="6880860" cy="980440"/>
           </a:xfrm>
           <a:prstGeom prst="rect">
             <a:avLst/>
@@ -6915,11 +6998,11 @@
           <a:p>
             <a:pPr algn="l">
               <a:lnSpc>
-                <a:spcPct val="140000"/>
+                <a:spcPts val="3500"/>
               </a:lnSpc>
             </a:pPr>
             <a:r>
-              <a:rPr sz="2100" i="0" b="0">
+              <a:rPr sz="2500" i="0" b="0">
                 <a:solidFill>
                   <a:srgbClr val="6B6B66"/>
                 </a:solidFill>
@@ -6938,14 +7021,14 @@
         </p:nvSpPr>
         <p:spPr>
           <a:xfrm>
-            <a:off x="9395460" y="3837707"/>
-            <a:ext cx="6880860" cy="10973"/>
+            <a:off x="9395460" y="3752977"/>
+            <a:ext cx="6880860" cy="56693"/>
           </a:xfrm>
           <a:prstGeom prst="rect">
             <a:avLst/>
           </a:prstGeom>
           <a:solidFill>
-            <a:srgbClr val="DFDDD7"/>
+            <a:srgbClr val="CC754E"/>
           </a:solidFill>
           <a:ln>
             <a:noFill/>
@@ -6982,8 +7065,8 @@
         </p:nvSpPr>
         <p:spPr>
           <a:xfrm>
-            <a:off x="9395460" y="4093739"/>
-            <a:ext cx="6880860" cy="526085"/>
+            <a:off x="9395460" y="4027297"/>
+            <a:ext cx="6880860" cy="535940"/>
           </a:xfrm>
           <a:prstGeom prst="rect">
             <a:avLst/>
@@ -6998,11 +7081,11 @@
           <a:p>
             <a:pPr algn="l">
               <a:lnSpc>
-                <a:spcPct val="140000"/>
+                <a:spcPts val="3500"/>
               </a:lnSpc>
             </a:pPr>
             <a:r>
-              <a:rPr sz="2300" i="0" b="0">
+              <a:rPr sz="2500" i="0" b="0">
                 <a:solidFill>
                   <a:srgbClr val="1C1C1A"/>
                 </a:solidFill>
@@ -7021,8 +7104,8 @@
         </p:nvSpPr>
         <p:spPr>
           <a:xfrm>
-            <a:off x="9395460" y="4784416"/>
-            <a:ext cx="6880860" cy="1017422"/>
+            <a:off x="9395460" y="4764405"/>
+            <a:ext cx="6880860" cy="980440"/>
           </a:xfrm>
           <a:prstGeom prst="rect">
             <a:avLst/>
@@ -7037,11 +7120,11 @@
           <a:p>
             <a:pPr algn="l">
               <a:lnSpc>
-                <a:spcPct val="140000"/>
+                <a:spcPts val="3500"/>
               </a:lnSpc>
             </a:pPr>
             <a:r>
-              <a:rPr sz="2100" i="0" b="0">
+              <a:rPr sz="2500" i="0" b="0">
                 <a:solidFill>
                   <a:srgbClr val="6B6B66"/>
                 </a:solidFill>
@@ -7054,14 +7137,58 @@
       </p:sp>
       <p:sp>
         <p:nvSpPr>
-          <p:cNvPr id="12" name="TextBox 11"/>
+          <p:cNvPr id="12" name="Rectangle 11"/>
+          <p:cNvSpPr/>
+          <p:nvPr/>
+        </p:nvSpPr>
+        <p:spPr>
+          <a:xfrm>
+            <a:off x="9133942" y="4063873"/>
+            <a:ext cx="19202" cy="1534668"/>
+          </a:xfrm>
+          <a:prstGeom prst="rect">
+            <a:avLst/>
+          </a:prstGeom>
+          <a:solidFill>
+            <a:srgbClr val="CC754E"/>
+          </a:solidFill>
+          <a:ln>
+            <a:noFill/>
+          </a:ln>
+          <a:effectLst/>
+        </p:spPr>
+        <p:style>
+          <a:lnRef idx="1">
+            <a:schemeClr val="accent1"/>
+          </a:lnRef>
+          <a:fillRef idx="3">
+            <a:schemeClr val="accent1"/>
+          </a:fillRef>
+          <a:effectRef idx="2">
+            <a:schemeClr val="accent1"/>
+          </a:effectRef>
+          <a:fontRef idx="minor">
+            <a:schemeClr val="lt1"/>
+          </a:fontRef>
+        </p:style>
+        <p:txBody>
+          <a:bodyPr rtlCol="0" anchor="ctr"/>
+          <a:lstStyle/>
+          <a:p>
+            <a:pPr algn="ctr"/>
+          </a:p>
+        </p:txBody>
+      </p:sp>
+      <p:sp>
+        <p:nvSpPr>
+          <p:cNvPr id="13" name="TextBox 12"/>
           <p:cNvSpPr txBox="1"/>
           <p:nvPr/>
         </p:nvSpPr>
         <p:spPr>
           <a:xfrm>
-            <a:off x="2011680" y="6213318"/>
-            <a:ext cx="12252960" cy="1017422"/>
+            <a:off x="3986784" y="6311773"/>
+            <a:ext cx="10314432" cy="980440"/>
           </a:xfrm>
           <a:prstGeom prst="rect">
             <a:avLst/>
@@ -7074,13 +7201,13 @@
           </a:bodyPr>
           <a:lstStyle/>
           <a:p>
-            <a:pPr algn="l">
+            <a:pPr algn="ctr">
               <a:lnSpc>
-                <a:spcPct val="140000"/>
+                <a:spcPts val="3500"/>
               </a:lnSpc>
             </a:pPr>
             <a:r>
-              <a:rPr sz="2100" i="0" b="0">
+              <a:rPr sz="2500" i="0" b="0">
                 <a:solidFill>
                   <a:srgbClr val="6B6B66"/>
                 </a:solidFill>
@@ -7191,7 +7318,7 @@
           <a:p>
             <a:pPr algn="l">
               <a:lnSpc>
-                <a:spcPct val="114000"/>
+                <a:spcPts val="8549"/>
               </a:lnSpc>
             </a:pPr>
             <a:r>
@@ -7207,7 +7334,7 @@
           <a:p>
             <a:pPr algn="l">
               <a:lnSpc>
-                <a:spcPct val="114000"/>
+                <a:spcPts val="8549"/>
               </a:lnSpc>
             </a:pPr>
             <a:r>
@@ -7567,7 +7694,7 @@
           <a:p>
             <a:pPr algn="ctr">
               <a:lnSpc>
-                <a:spcPct val="140000"/>
+                <a:spcPts val="2729"/>
               </a:lnSpc>
             </a:pPr>
             <a:r>
@@ -7688,8 +7815,8 @@
         </p:nvSpPr>
         <p:spPr>
           <a:xfrm>
-            <a:off x="2011680" y="2552120"/>
-            <a:ext cx="14264640" cy="882396"/>
+            <a:off x="2011680" y="2775331"/>
+            <a:ext cx="14264640" cy="1005078"/>
           </a:xfrm>
           <a:prstGeom prst="rect">
             <a:avLst/>
@@ -7704,7 +7831,7 @@
           <a:p>
             <a:pPr algn="l">
               <a:lnSpc>
-                <a:spcPct val="114000"/>
+                <a:spcPts val="5754"/>
               </a:lnSpc>
             </a:pPr>
             <a:r>
@@ -7727,14 +7854,14 @@
         </p:nvSpPr>
         <p:spPr>
           <a:xfrm>
-            <a:off x="2011680" y="3489014"/>
+            <a:off x="2011680" y="3688969"/>
             <a:ext cx="14264640" cy="10973"/>
           </a:xfrm>
           <a:prstGeom prst="rect">
             <a:avLst/>
           </a:prstGeom>
           <a:solidFill>
-            <a:srgbClr val="DFDDD7"/>
+            <a:srgbClr val="A5A49F"/>
           </a:solidFill>
           <a:ln>
             <a:noFill/>
@@ -7771,8 +7898,8 @@
         </p:nvSpPr>
         <p:spPr>
           <a:xfrm>
-            <a:off x="2011680" y="3836486"/>
-            <a:ext cx="12252960" cy="620573"/>
+            <a:off x="2011680" y="4036441"/>
+            <a:ext cx="12252960" cy="535940"/>
           </a:xfrm>
           <a:prstGeom prst="rect">
             <a:avLst/>
@@ -7787,11 +7914,11 @@
           <a:p>
             <a:pPr algn="l">
               <a:lnSpc>
-                <a:spcPct val="140000"/>
+                <a:spcPts val="3500"/>
               </a:lnSpc>
             </a:pPr>
             <a:r>
-              <a:rPr sz="2400" i="0" b="0">
+              <a:rPr sz="2500" i="0" b="0">
                 <a:solidFill>
                   <a:srgbClr val="6B6B66"/>
                 </a:solidFill>
@@ -7810,8 +7937,8 @@
         </p:nvSpPr>
         <p:spPr>
           <a:xfrm>
-            <a:off x="2011680" y="4694803"/>
-            <a:ext cx="12252960" cy="1149706"/>
+            <a:off x="2011680" y="4810125"/>
+            <a:ext cx="12252960" cy="980440"/>
           </a:xfrm>
           <a:prstGeom prst="rect">
             <a:avLst/>
@@ -7826,11 +7953,11 @@
           <a:p>
             <a:pPr algn="l">
               <a:lnSpc>
-                <a:spcPct val="140000"/>
+                <a:spcPts val="3500"/>
               </a:lnSpc>
             </a:pPr>
             <a:r>
-              <a:rPr sz="2400" i="0" b="0">
+              <a:rPr sz="2500" i="0" b="0">
                 <a:solidFill>
                   <a:srgbClr val="6B6B66"/>
                 </a:solidFill>
@@ -7849,8 +7976,8 @@
         </p:nvSpPr>
         <p:spPr>
           <a:xfrm>
-            <a:off x="2011680" y="6082253"/>
-            <a:ext cx="12252960" cy="1149706"/>
+            <a:off x="2011680" y="6028309"/>
+            <a:ext cx="12252960" cy="980440"/>
           </a:xfrm>
           <a:prstGeom prst="rect">
             <a:avLst/>
@@ -7865,11 +7992,11 @@
           <a:p>
             <a:pPr algn="l">
               <a:lnSpc>
-                <a:spcPct val="140000"/>
+                <a:spcPts val="3500"/>
               </a:lnSpc>
             </a:pPr>
             <a:r>
-              <a:rPr sz="2400" i="0" b="0">
+              <a:rPr sz="2500" i="0" b="0">
                 <a:solidFill>
                   <a:srgbClr val="6B6B66"/>
                 </a:solidFill>
@@ -7986,8 +8113,8 @@
         </p:nvSpPr>
         <p:spPr>
           <a:xfrm>
-            <a:off x="2011680" y="2553341"/>
-            <a:ext cx="14264640" cy="882396"/>
+            <a:off x="2011680" y="2491867"/>
+            <a:ext cx="14264640" cy="1005078"/>
           </a:xfrm>
           <a:prstGeom prst="rect">
             <a:avLst/>
@@ -8002,7 +8129,7 @@
           <a:p>
             <a:pPr algn="l">
               <a:lnSpc>
-                <a:spcPct val="114000"/>
+                <a:spcPts val="5754"/>
               </a:lnSpc>
             </a:pPr>
             <a:r>
@@ -8025,14 +8152,14 @@
         </p:nvSpPr>
         <p:spPr>
           <a:xfrm>
-            <a:off x="2011680" y="3490235"/>
+            <a:off x="2011680" y="3405505"/>
             <a:ext cx="14264640" cy="10973"/>
           </a:xfrm>
           <a:prstGeom prst="rect">
             <a:avLst/>
           </a:prstGeom>
           <a:solidFill>
-            <a:srgbClr val="DFDDD7"/>
+            <a:srgbClr val="A5A49F"/>
           </a:solidFill>
           <a:ln>
             <a:noFill/>
@@ -8069,14 +8196,14 @@
         </p:nvSpPr>
         <p:spPr>
           <a:xfrm>
-            <a:off x="2011680" y="3837707"/>
-            <a:ext cx="6880860" cy="10973"/>
+            <a:off x="2011680" y="3752977"/>
+            <a:ext cx="6880860" cy="56693"/>
           </a:xfrm>
           <a:prstGeom prst="rect">
             <a:avLst/>
           </a:prstGeom>
           <a:solidFill>
-            <a:srgbClr val="DFDDD7"/>
+            <a:srgbClr val="CC754E"/>
           </a:solidFill>
           <a:ln>
             <a:noFill/>
@@ -8113,8 +8240,8 @@
         </p:nvSpPr>
         <p:spPr>
           <a:xfrm>
-            <a:off x="2011680" y="4093739"/>
-            <a:ext cx="6880860" cy="526085"/>
+            <a:off x="2011680" y="4027297"/>
+            <a:ext cx="6880860" cy="535940"/>
           </a:xfrm>
           <a:prstGeom prst="rect">
             <a:avLst/>
@@ -8129,11 +8256,11 @@
           <a:p>
             <a:pPr algn="l">
               <a:lnSpc>
-                <a:spcPct val="140000"/>
+                <a:spcPts val="3500"/>
               </a:lnSpc>
             </a:pPr>
             <a:r>
-              <a:rPr sz="2300" i="0" b="0">
+              <a:rPr sz="2500" i="0" b="0">
                 <a:solidFill>
                   <a:srgbClr val="1C1C1A"/>
                 </a:solidFill>
@@ -8152,8 +8279,8 @@
         </p:nvSpPr>
         <p:spPr>
           <a:xfrm>
-            <a:off x="2011680" y="4784416"/>
-            <a:ext cx="6880860" cy="1017422"/>
+            <a:off x="2011680" y="4764405"/>
+            <a:ext cx="6880860" cy="980440"/>
           </a:xfrm>
           <a:prstGeom prst="rect">
             <a:avLst/>
@@ -8168,11 +8295,11 @@
           <a:p>
             <a:pPr algn="l">
               <a:lnSpc>
-                <a:spcPct val="140000"/>
+                <a:spcPts val="3500"/>
               </a:lnSpc>
             </a:pPr>
             <a:r>
-              <a:rPr sz="2100" i="0" b="0">
+              <a:rPr sz="2500" i="0" b="0">
                 <a:solidFill>
                   <a:srgbClr val="6B6B66"/>
                 </a:solidFill>
@@ -8191,14 +8318,14 @@
         </p:nvSpPr>
         <p:spPr>
           <a:xfrm>
-            <a:off x="9395460" y="3837707"/>
-            <a:ext cx="6880860" cy="10973"/>
+            <a:off x="9395460" y="3752977"/>
+            <a:ext cx="6880860" cy="56693"/>
           </a:xfrm>
           <a:prstGeom prst="rect">
             <a:avLst/>
           </a:prstGeom>
           <a:solidFill>
-            <a:srgbClr val="DFDDD7"/>
+            <a:srgbClr val="CC754E"/>
           </a:solidFill>
           <a:ln>
             <a:noFill/>
@@ -8235,8 +8362,8 @@
         </p:nvSpPr>
         <p:spPr>
           <a:xfrm>
-            <a:off x="9395460" y="4093739"/>
-            <a:ext cx="6880860" cy="526085"/>
+            <a:off x="9395460" y="4027297"/>
+            <a:ext cx="6880860" cy="535940"/>
           </a:xfrm>
           <a:prstGeom prst="rect">
             <a:avLst/>
@@ -8251,11 +8378,11 @@
           <a:p>
             <a:pPr algn="l">
               <a:lnSpc>
-                <a:spcPct val="140000"/>
+                <a:spcPts val="3500"/>
               </a:lnSpc>
             </a:pPr>
             <a:r>
-              <a:rPr sz="2300" i="0" b="0">
+              <a:rPr sz="2500" i="0" b="0">
                 <a:solidFill>
                   <a:srgbClr val="1C1C1A"/>
                 </a:solidFill>
@@ -8274,8 +8401,8 @@
         </p:nvSpPr>
         <p:spPr>
           <a:xfrm>
-            <a:off x="9395460" y="4784416"/>
-            <a:ext cx="6880860" cy="1017422"/>
+            <a:off x="9395460" y="4764405"/>
+            <a:ext cx="6880860" cy="980440"/>
           </a:xfrm>
           <a:prstGeom prst="rect">
             <a:avLst/>
@@ -8290,11 +8417,11 @@
           <a:p>
             <a:pPr algn="l">
               <a:lnSpc>
-                <a:spcPct val="140000"/>
+                <a:spcPts val="3500"/>
               </a:lnSpc>
             </a:pPr>
             <a:r>
-              <a:rPr sz="2100" i="0" b="0">
+              <a:rPr sz="2500" i="0" b="0">
                 <a:solidFill>
                   <a:srgbClr val="6B6B66"/>
                 </a:solidFill>
@@ -8307,14 +8434,58 @@
       </p:sp>
       <p:sp>
         <p:nvSpPr>
-          <p:cNvPr id="12" name="TextBox 11"/>
+          <p:cNvPr id="12" name="Rectangle 11"/>
+          <p:cNvSpPr/>
+          <p:nvPr/>
+        </p:nvSpPr>
+        <p:spPr>
+          <a:xfrm>
+            <a:off x="9133942" y="4063873"/>
+            <a:ext cx="19202" cy="1534668"/>
+          </a:xfrm>
+          <a:prstGeom prst="rect">
+            <a:avLst/>
+          </a:prstGeom>
+          <a:solidFill>
+            <a:srgbClr val="CC754E"/>
+          </a:solidFill>
+          <a:ln>
+            <a:noFill/>
+          </a:ln>
+          <a:effectLst/>
+        </p:spPr>
+        <p:style>
+          <a:lnRef idx="1">
+            <a:schemeClr val="accent1"/>
+          </a:lnRef>
+          <a:fillRef idx="3">
+            <a:schemeClr val="accent1"/>
+          </a:fillRef>
+          <a:effectRef idx="2">
+            <a:schemeClr val="accent1"/>
+          </a:effectRef>
+          <a:fontRef idx="minor">
+            <a:schemeClr val="lt1"/>
+          </a:fontRef>
+        </p:style>
+        <p:txBody>
+          <a:bodyPr rtlCol="0" anchor="ctr"/>
+          <a:lstStyle/>
+          <a:p>
+            <a:pPr algn="ctr"/>
+          </a:p>
+        </p:txBody>
+      </p:sp>
+      <p:sp>
+        <p:nvSpPr>
+          <p:cNvPr id="13" name="TextBox 12"/>
           <p:cNvSpPr txBox="1"/>
           <p:nvPr/>
         </p:nvSpPr>
         <p:spPr>
           <a:xfrm>
-            <a:off x="2011680" y="6213318"/>
-            <a:ext cx="12252960" cy="1017422"/>
+            <a:off x="3986784" y="6311773"/>
+            <a:ext cx="10314432" cy="980440"/>
           </a:xfrm>
           <a:prstGeom prst="rect">
             <a:avLst/>
@@ -8327,13 +8498,13 @@
           </a:bodyPr>
           <a:lstStyle/>
           <a:p>
-            <a:pPr algn="l">
+            <a:pPr algn="ctr">
               <a:lnSpc>
-                <a:spcPct val="140000"/>
+                <a:spcPts val="3500"/>
               </a:lnSpc>
             </a:pPr>
             <a:r>
-              <a:rPr sz="2100" i="0" b="0">
+              <a:rPr sz="2500" i="0" b="0">
                 <a:solidFill>
                   <a:srgbClr val="6B6B66"/>
                 </a:solidFill>
@@ -8450,8 +8621,8 @@
         </p:nvSpPr>
         <p:spPr>
           <a:xfrm>
-            <a:off x="2011680" y="2784836"/>
-            <a:ext cx="14264640" cy="882396"/>
+            <a:off x="2011680" y="2269617"/>
+            <a:ext cx="14264640" cy="1005078"/>
           </a:xfrm>
           <a:prstGeom prst="rect">
             <a:avLst/>
@@ -8466,7 +8637,7 @@
           <a:p>
             <a:pPr algn="l">
               <a:lnSpc>
-                <a:spcPct val="114000"/>
+                <a:spcPts val="5754"/>
               </a:lnSpc>
             </a:pPr>
             <a:r>
@@ -8476,7 +8647,16 @@
                 </a:solidFill>
                 <a:latin typeface="Outfit 1 Light"/>
               </a:rPr>
-              <a:t>ONDE CADA UM PODE GERAR MAIS VALOR</a:t>
+              <a:t>ONDE CADA UM PODE </a:t>
+            </a:r>
+            <a:r>
+              <a:rPr sz="4200" i="0" b="0">
+                <a:solidFill>
+                  <a:srgbClr val="1C1C1A"/>
+                </a:solidFill>
+                <a:latin typeface="Outfit 1 Bold"/>
+              </a:rPr>
+              <a:t>GERAR MAIS VALOR</a:t>
             </a:r>
           </a:p>
         </p:txBody>
@@ -8489,14 +8669,14 @@
         </p:nvSpPr>
         <p:spPr>
           <a:xfrm>
-            <a:off x="2011680" y="3721730"/>
+            <a:off x="2011680" y="3183255"/>
             <a:ext cx="14264640" cy="10973"/>
           </a:xfrm>
           <a:prstGeom prst="rect">
             <a:avLst/>
           </a:prstGeom>
           <a:solidFill>
-            <a:srgbClr val="DFDDD7"/>
+            <a:srgbClr val="A5A49F"/>
           </a:solidFill>
           <a:ln>
             <a:noFill/>
@@ -8533,14 +8713,14 @@
         </p:nvSpPr>
         <p:spPr>
           <a:xfrm>
-            <a:off x="2011680" y="4069202"/>
-            <a:ext cx="6880860" cy="10973"/>
+            <a:off x="2011680" y="3530727"/>
+            <a:ext cx="6880860" cy="56693"/>
           </a:xfrm>
           <a:prstGeom prst="rect">
             <a:avLst/>
           </a:prstGeom>
           <a:solidFill>
-            <a:srgbClr val="DFDDD7"/>
+            <a:srgbClr val="CC754E"/>
           </a:solidFill>
           <a:ln>
             <a:noFill/>
@@ -8577,8 +8757,8 @@
         </p:nvSpPr>
         <p:spPr>
           <a:xfrm>
-            <a:off x="2011680" y="4325234"/>
-            <a:ext cx="6880860" cy="526085"/>
+            <a:off x="2011680" y="3805047"/>
+            <a:ext cx="6880860" cy="535940"/>
           </a:xfrm>
           <a:prstGeom prst="rect">
             <a:avLst/>
@@ -8593,11 +8773,11 @@
           <a:p>
             <a:pPr algn="l">
               <a:lnSpc>
-                <a:spcPct val="140000"/>
+                <a:spcPts val="3500"/>
               </a:lnSpc>
             </a:pPr>
             <a:r>
-              <a:rPr sz="2300" i="0" b="0">
+              <a:rPr sz="2500" i="0" b="0">
                 <a:solidFill>
                   <a:srgbClr val="1C1C1A"/>
                 </a:solidFill>
@@ -8616,8 +8796,8 @@
         </p:nvSpPr>
         <p:spPr>
           <a:xfrm>
-            <a:off x="2011680" y="5015911"/>
-            <a:ext cx="6880860" cy="1017422"/>
+            <a:off x="2011680" y="4542155"/>
+            <a:ext cx="6880860" cy="1424940"/>
           </a:xfrm>
           <a:prstGeom prst="rect">
             <a:avLst/>
@@ -8632,11 +8812,11 @@
           <a:p>
             <a:pPr algn="l">
               <a:lnSpc>
-                <a:spcPct val="140000"/>
+                <a:spcPts val="3500"/>
               </a:lnSpc>
             </a:pPr>
             <a:r>
-              <a:rPr sz="2100" i="0" b="0">
+              <a:rPr sz="2500" i="0" b="0">
                 <a:solidFill>
                   <a:srgbClr val="6B6B66"/>
                 </a:solidFill>
@@ -8655,14 +8835,14 @@
         </p:nvSpPr>
         <p:spPr>
           <a:xfrm>
-            <a:off x="9395460" y="4069202"/>
-            <a:ext cx="6880860" cy="10973"/>
+            <a:off x="9395460" y="3530727"/>
+            <a:ext cx="6880860" cy="56693"/>
           </a:xfrm>
           <a:prstGeom prst="rect">
             <a:avLst/>
           </a:prstGeom>
           <a:solidFill>
-            <a:srgbClr val="DFDDD7"/>
+            <a:srgbClr val="CC754E"/>
           </a:solidFill>
           <a:ln>
             <a:noFill/>
@@ -8699,8 +8879,8 @@
         </p:nvSpPr>
         <p:spPr>
           <a:xfrm>
-            <a:off x="9395460" y="4325234"/>
-            <a:ext cx="6880860" cy="526085"/>
+            <a:off x="9395460" y="3805047"/>
+            <a:ext cx="6880860" cy="535940"/>
           </a:xfrm>
           <a:prstGeom prst="rect">
             <a:avLst/>
@@ -8715,11 +8895,11 @@
           <a:p>
             <a:pPr algn="l">
               <a:lnSpc>
-                <a:spcPct val="140000"/>
+                <a:spcPts val="3500"/>
               </a:lnSpc>
             </a:pPr>
             <a:r>
-              <a:rPr sz="2300" i="0" b="0">
+              <a:rPr sz="2500" i="0" b="0">
                 <a:solidFill>
                   <a:srgbClr val="1C1C1A"/>
                 </a:solidFill>
@@ -8738,8 +8918,8 @@
         </p:nvSpPr>
         <p:spPr>
           <a:xfrm>
-            <a:off x="9395460" y="5015911"/>
-            <a:ext cx="6880860" cy="1017422"/>
+            <a:off x="9395460" y="4542155"/>
+            <a:ext cx="6880860" cy="1424940"/>
           </a:xfrm>
           <a:prstGeom prst="rect">
             <a:avLst/>
@@ -8754,11 +8934,11 @@
           <a:p>
             <a:pPr algn="l">
               <a:lnSpc>
-                <a:spcPct val="140000"/>
+                <a:spcPts val="3500"/>
               </a:lnSpc>
             </a:pPr>
             <a:r>
-              <a:rPr sz="2100" i="0" b="0">
+              <a:rPr sz="2500" i="0" b="0">
                 <a:solidFill>
                   <a:srgbClr val="6B6B66"/>
                 </a:solidFill>
@@ -8771,14 +8951,58 @@
       </p:sp>
       <p:sp>
         <p:nvSpPr>
-          <p:cNvPr id="12" name="TextBox 11"/>
+          <p:cNvPr id="12" name="Rectangle 11"/>
+          <p:cNvSpPr/>
+          <p:nvPr/>
+        </p:nvSpPr>
+        <p:spPr>
+          <a:xfrm>
+            <a:off x="9133942" y="3841623"/>
+            <a:ext cx="19202" cy="1979168"/>
+          </a:xfrm>
+          <a:prstGeom prst="rect">
+            <a:avLst/>
+          </a:prstGeom>
+          <a:solidFill>
+            <a:srgbClr val="CC754E"/>
+          </a:solidFill>
+          <a:ln>
+            <a:noFill/>
+          </a:ln>
+          <a:effectLst/>
+        </p:spPr>
+        <p:style>
+          <a:lnRef idx="1">
+            <a:schemeClr val="accent1"/>
+          </a:lnRef>
+          <a:fillRef idx="3">
+            <a:schemeClr val="accent1"/>
+          </a:fillRef>
+          <a:effectRef idx="2">
+            <a:schemeClr val="accent1"/>
+          </a:effectRef>
+          <a:fontRef idx="minor">
+            <a:schemeClr val="lt1"/>
+          </a:fontRef>
+        </p:style>
+        <p:txBody>
+          <a:bodyPr rtlCol="0" anchor="ctr"/>
+          <a:lstStyle/>
+          <a:p>
+            <a:pPr algn="ctr"/>
+          </a:p>
+        </p:txBody>
+      </p:sp>
+      <p:sp>
+        <p:nvSpPr>
+          <p:cNvPr id="13" name="TextBox 12"/>
           <p:cNvSpPr txBox="1"/>
           <p:nvPr/>
         </p:nvSpPr>
         <p:spPr>
           <a:xfrm>
-            <a:off x="2011680" y="6444813"/>
-            <a:ext cx="12252960" cy="554431"/>
+            <a:off x="3986784" y="6534023"/>
+            <a:ext cx="10314432" cy="980440"/>
           </a:xfrm>
           <a:prstGeom prst="rect">
             <a:avLst/>
@@ -8791,13 +9015,13 @@
           </a:bodyPr>
           <a:lstStyle/>
           <a:p>
-            <a:pPr algn="l">
+            <a:pPr algn="ctr">
               <a:lnSpc>
-                <a:spcPct val="140000"/>
+                <a:spcPts val="3500"/>
               </a:lnSpc>
             </a:pPr>
             <a:r>
-              <a:rPr sz="2100" i="0" b="0">
+              <a:rPr sz="2500" i="0" b="0">
                 <a:solidFill>
                   <a:srgbClr val="6B6B66"/>
                 </a:solidFill>
@@ -8914,8 +9138,8 @@
         </p:nvSpPr>
         <p:spPr>
           <a:xfrm>
-            <a:off x="2011680" y="2552121"/>
-            <a:ext cx="14264640" cy="882396"/>
+            <a:off x="2011680" y="2775331"/>
+            <a:ext cx="14264640" cy="1005078"/>
           </a:xfrm>
           <a:prstGeom prst="rect">
             <a:avLst/>
@@ -8930,7 +9154,7 @@
           <a:p>
             <a:pPr algn="l">
               <a:lnSpc>
-                <a:spcPct val="114000"/>
+                <a:spcPts val="5754"/>
               </a:lnSpc>
             </a:pPr>
             <a:r>
@@ -8940,7 +9164,16 @@
                 </a:solidFill>
                 <a:latin typeface="Outfit 1 Light"/>
               </a:rPr>
-              <a:t>UMA PARCERIA QUE EVOLUI A EMPRESA</a:t>
+              <a:t>UMA PARCERIA QUE </a:t>
+            </a:r>
+            <a:r>
+              <a:rPr sz="4200" i="0" b="0">
+                <a:solidFill>
+                  <a:srgbClr val="1C1C1A"/>
+                </a:solidFill>
+                <a:latin typeface="Outfit 1 Bold"/>
+              </a:rPr>
+              <a:t>EVOLUI AS EMPRESAS</a:t>
             </a:r>
           </a:p>
         </p:txBody>
@@ -8953,14 +9186,14 @@
         </p:nvSpPr>
         <p:spPr>
           <a:xfrm>
-            <a:off x="2011680" y="3489015"/>
+            <a:off x="2011680" y="3688969"/>
             <a:ext cx="14264640" cy="10973"/>
           </a:xfrm>
           <a:prstGeom prst="rect">
             <a:avLst/>
           </a:prstGeom>
           <a:solidFill>
-            <a:srgbClr val="DFDDD7"/>
+            <a:srgbClr val="A5A49F"/>
           </a:solidFill>
           <a:ln>
             <a:noFill/>
@@ -8997,8 +9230,8 @@
         </p:nvSpPr>
         <p:spPr>
           <a:xfrm>
-            <a:off x="2011680" y="3836487"/>
-            <a:ext cx="12252960" cy="1149706"/>
+            <a:off x="2011680" y="4036441"/>
+            <a:ext cx="12252960" cy="980440"/>
           </a:xfrm>
           <a:prstGeom prst="rect">
             <a:avLst/>
@@ -9013,11 +9246,11 @@
           <a:p>
             <a:pPr algn="l">
               <a:lnSpc>
-                <a:spcPct val="140000"/>
+                <a:spcPts val="3500"/>
               </a:lnSpc>
             </a:pPr>
             <a:r>
-              <a:rPr sz="2400" i="0" b="0">
+              <a:rPr sz="2500" i="0" b="0">
                 <a:solidFill>
                   <a:srgbClr val="6B6B66"/>
                 </a:solidFill>
@@ -9036,8 +9269,8 @@
         </p:nvSpPr>
         <p:spPr>
           <a:xfrm>
-            <a:off x="2011680" y="5223937"/>
-            <a:ext cx="12252960" cy="1149706"/>
+            <a:off x="2011680" y="5254625"/>
+            <a:ext cx="12252960" cy="980440"/>
           </a:xfrm>
           <a:prstGeom prst="rect">
             <a:avLst/>
@@ -9052,11 +9285,11 @@
           <a:p>
             <a:pPr algn="l">
               <a:lnSpc>
-                <a:spcPct val="140000"/>
+                <a:spcPts val="3500"/>
               </a:lnSpc>
             </a:pPr>
             <a:r>
-              <a:rPr sz="2400" i="0" b="0">
+              <a:rPr sz="2500" i="0" b="0">
                 <a:solidFill>
                   <a:srgbClr val="6B6B66"/>
                 </a:solidFill>
@@ -9075,8 +9308,8 @@
         </p:nvSpPr>
         <p:spPr>
           <a:xfrm>
-            <a:off x="2011680" y="6611386"/>
-            <a:ext cx="12252960" cy="620573"/>
+            <a:off x="2011680" y="6472809"/>
+            <a:ext cx="12252960" cy="535940"/>
           </a:xfrm>
           <a:prstGeom prst="rect">
             <a:avLst/>
@@ -9091,11 +9324,11 @@
           <a:p>
             <a:pPr algn="l">
               <a:lnSpc>
-                <a:spcPct val="140000"/>
+                <a:spcPts val="3500"/>
               </a:lnSpc>
             </a:pPr>
             <a:r>
-              <a:rPr sz="2400" i="0" b="0">
+              <a:rPr sz="2500" i="0" b="0">
                 <a:solidFill>
                   <a:srgbClr val="6B6B66"/>
                 </a:solidFill>
@@ -9212,8 +9445,8 @@
         </p:nvSpPr>
         <p:spPr>
           <a:xfrm>
-            <a:off x="2011680" y="2552120"/>
-            <a:ext cx="14264640" cy="882396"/>
+            <a:off x="2011680" y="2775331"/>
+            <a:ext cx="14264640" cy="1005078"/>
           </a:xfrm>
           <a:prstGeom prst="rect">
             <a:avLst/>
@@ -9228,7 +9461,7 @@
           <a:p>
             <a:pPr algn="l">
               <a:lnSpc>
-                <a:spcPct val="114000"/>
+                <a:spcPts val="5754"/>
               </a:lnSpc>
             </a:pPr>
             <a:r>
@@ -9251,14 +9484,14 @@
         </p:nvSpPr>
         <p:spPr>
           <a:xfrm>
-            <a:off x="2011680" y="3489014"/>
+            <a:off x="2011680" y="3688969"/>
             <a:ext cx="14264640" cy="10973"/>
           </a:xfrm>
           <a:prstGeom prst="rect">
             <a:avLst/>
           </a:prstGeom>
           <a:solidFill>
-            <a:srgbClr val="DFDDD7"/>
+            <a:srgbClr val="A5A49F"/>
           </a:solidFill>
           <a:ln>
             <a:noFill/>
@@ -9295,8 +9528,8 @@
         </p:nvSpPr>
         <p:spPr>
           <a:xfrm>
-            <a:off x="2011680" y="3836486"/>
-            <a:ext cx="12252960" cy="620573"/>
+            <a:off x="2011680" y="4036441"/>
+            <a:ext cx="12252960" cy="535940"/>
           </a:xfrm>
           <a:prstGeom prst="rect">
             <a:avLst/>
@@ -9311,11 +9544,11 @@
           <a:p>
             <a:pPr algn="l">
               <a:lnSpc>
-                <a:spcPct val="140000"/>
+                <a:spcPts val="3500"/>
               </a:lnSpc>
             </a:pPr>
             <a:r>
-              <a:rPr sz="2400" i="0" b="0">
+              <a:rPr sz="2500" i="0" b="0">
                 <a:solidFill>
                   <a:srgbClr val="6B6B66"/>
                 </a:solidFill>
@@ -9334,8 +9567,8 @@
         </p:nvSpPr>
         <p:spPr>
           <a:xfrm>
-            <a:off x="2011680" y="4694803"/>
-            <a:ext cx="12252960" cy="1149706"/>
+            <a:off x="2011680" y="4810125"/>
+            <a:ext cx="12252960" cy="980440"/>
           </a:xfrm>
           <a:prstGeom prst="rect">
             <a:avLst/>
@@ -9350,11 +9583,11 @@
           <a:p>
             <a:pPr algn="l">
               <a:lnSpc>
-                <a:spcPct val="140000"/>
+                <a:spcPts val="3500"/>
               </a:lnSpc>
             </a:pPr>
             <a:r>
-              <a:rPr sz="2400" i="0" b="0">
+              <a:rPr sz="2500" i="0" b="0">
                 <a:solidFill>
                   <a:srgbClr val="6B6B66"/>
                 </a:solidFill>
@@ -9373,8 +9606,8 @@
         </p:nvSpPr>
         <p:spPr>
           <a:xfrm>
-            <a:off x="2011680" y="6082253"/>
-            <a:ext cx="12252960" cy="1149706"/>
+            <a:off x="2011680" y="6028309"/>
+            <a:ext cx="12252960" cy="980440"/>
           </a:xfrm>
           <a:prstGeom prst="rect">
             <a:avLst/>
@@ -9389,11 +9622,11 @@
           <a:p>
             <a:pPr algn="l">
               <a:lnSpc>
-                <a:spcPct val="140000"/>
+                <a:spcPts val="3500"/>
               </a:lnSpc>
             </a:pPr>
             <a:r>
-              <a:rPr sz="2400" i="0" b="0">
+              <a:rPr sz="2500" i="0" b="0">
                 <a:solidFill>
                   <a:srgbClr val="6B6B66"/>
                 </a:solidFill>
@@ -9510,14 +9743,14 @@
         </p:nvSpPr>
         <p:spPr>
           <a:xfrm>
-            <a:off x="2011680" y="2894259"/>
+            <a:off x="2011680" y="3421253"/>
             <a:ext cx="1188720" cy="27432"/>
           </a:xfrm>
           <a:prstGeom prst="rect">
             <a:avLst/>
           </a:prstGeom>
           <a:solidFill>
-            <a:srgbClr val="A9724A"/>
+            <a:srgbClr val="CC754E"/>
           </a:solidFill>
           <a:ln>
             <a:noFill/>
@@ -9554,8 +9787,8 @@
         </p:nvSpPr>
         <p:spPr>
           <a:xfrm>
-            <a:off x="2011680" y="3296595"/>
-            <a:ext cx="14081760" cy="3211007"/>
+            <a:off x="2011680" y="3823589"/>
+            <a:ext cx="14081760" cy="1590040"/>
           </a:xfrm>
           <a:prstGeom prst="rect">
             <a:avLst/>
@@ -9570,13 +9803,13 @@
           <a:p>
             <a:pPr algn="l">
               <a:lnSpc>
-                <a:spcPct val="126000"/>
+                <a:spcPts val="5180"/>
               </a:lnSpc>
             </a:pPr>
             <a:r>
-              <a:rPr sz="7400" i="0" b="0">
-                <a:solidFill>
-                  <a:srgbClr val="1C1C1A"/>
+              <a:rPr sz="3700" i="0" b="0">
+                <a:solidFill>
+                  <a:srgbClr val="323330"/>
                 </a:solidFill>
                 <a:latin typeface="Outfit 1 Light"/>
               </a:rPr>
@@ -9586,13 +9819,13 @@
           <a:p>
             <a:pPr algn="l">
               <a:lnSpc>
-                <a:spcPct val="126000"/>
+                <a:spcPts val="5180"/>
               </a:lnSpc>
             </a:pPr>
             <a:r>
-              <a:rPr sz="7400" i="0" b="0">
-                <a:solidFill>
-                  <a:srgbClr val="1C1C1A"/>
+              <a:rPr sz="3700" i="0" b="0">
+                <a:solidFill>
+                  <a:srgbClr val="323330"/>
                 </a:solidFill>
                 <a:latin typeface="Outfit 1 Light"/>
               </a:rPr>
@@ -9609,8 +9842,8 @@
         </p:nvSpPr>
         <p:spPr>
           <a:xfrm>
-            <a:off x="2011680" y="6335390"/>
-            <a:ext cx="11887200" cy="554431"/>
+            <a:off x="2011680" y="5382387"/>
+            <a:ext cx="11887200" cy="980440"/>
           </a:xfrm>
           <a:prstGeom prst="rect">
             <a:avLst/>
@@ -9625,11 +9858,11 @@
           <a:p>
             <a:pPr algn="l">
               <a:lnSpc>
-                <a:spcPct val="140000"/>
+                <a:spcPts val="3500"/>
               </a:lnSpc>
             </a:pPr>
             <a:r>
-              <a:rPr sz="2100" i="0" b="0">
+              <a:rPr sz="2500" i="0" b="0">
                 <a:solidFill>
                   <a:srgbClr val="6B6B66"/>
                 </a:solidFill>
@@ -9700,8 +9933,8 @@
         </p:nvSpPr>
         <p:spPr>
           <a:xfrm>
-            <a:off x="2011680" y="3703320"/>
-            <a:ext cx="13716000" cy="923925"/>
+            <a:off x="2011680" y="2651760"/>
+            <a:ext cx="13716000" cy="1625600"/>
           </a:xfrm>
           <a:prstGeom prst="rect">
             <a:avLst/>
@@ -9716,11 +9949,11 @@
           <a:p>
             <a:pPr algn="l">
               <a:lnSpc>
-                <a:spcPct val="110000"/>
+                <a:spcPts val="10640"/>
               </a:lnSpc>
             </a:pPr>
             <a:r>
-              <a:rPr sz="4650" i="0" b="0">
+              <a:rPr sz="9500" i="0" b="0">
                 <a:solidFill>
                   <a:srgbClr val="1C1C1A"/>
                 </a:solidFill>
@@ -9747,8 +9980,8 @@
         </p:blipFill>
         <p:spPr>
           <a:xfrm>
-            <a:off x="2011680" y="5440680"/>
-            <a:ext cx="3246120" cy="771466"/>
+            <a:off x="1028700" y="5257800"/>
+            <a:ext cx="4421124" cy="1050715"/>
           </a:xfrm>
           <a:prstGeom prst="rect">
             <a:avLst/>
@@ -9815,7 +10048,7 @@
         </p:blipFill>
         <p:spPr>
           <a:xfrm>
-            <a:off x="6355080" y="5394960"/>
+            <a:off x="6073445" y="5312664"/>
             <a:ext cx="3291840" cy="942889"/>
           </a:xfrm>
           <a:prstGeom prst="rect">
@@ -9929,14 +10162,14 @@
         </p:nvSpPr>
         <p:spPr>
           <a:xfrm>
-            <a:off x="2011680" y="2708361"/>
+            <a:off x="2011680" y="3566922"/>
             <a:ext cx="1188720" cy="27432"/>
           </a:xfrm>
           <a:prstGeom prst="rect">
             <a:avLst/>
           </a:prstGeom>
           <a:solidFill>
-            <a:srgbClr val="A9724A"/>
+            <a:srgbClr val="CC754E"/>
           </a:solidFill>
           <a:ln>
             <a:noFill/>
@@ -9973,8 +10206,8 @@
         </p:nvSpPr>
         <p:spPr>
           <a:xfrm>
-            <a:off x="2011680" y="3110697"/>
-            <a:ext cx="14081760" cy="3965021"/>
+            <a:off x="2011680" y="3969258"/>
+            <a:ext cx="14081760" cy="2247900"/>
           </a:xfrm>
           <a:prstGeom prst="rect">
             <a:avLst/>
@@ -9989,13 +10222,13 @@
           <a:p>
             <a:pPr algn="l">
               <a:lnSpc>
-                <a:spcPct val="126000"/>
+                <a:spcPts val="5180"/>
               </a:lnSpc>
             </a:pPr>
             <a:r>
-              <a:rPr sz="6200" i="0" b="0">
-                <a:solidFill>
-                  <a:srgbClr val="1C1C1A"/>
+              <a:rPr sz="3700" i="0" b="0">
+                <a:solidFill>
+                  <a:srgbClr val="323330"/>
                 </a:solidFill>
                 <a:latin typeface="Outfit 1 Light"/>
               </a:rPr>
@@ -10005,13 +10238,13 @@
           <a:p>
             <a:pPr algn="l">
               <a:lnSpc>
-                <a:spcPct val="126000"/>
+                <a:spcPts val="5180"/>
               </a:lnSpc>
             </a:pPr>
             <a:r>
-              <a:rPr sz="6200" i="0" b="0">
-                <a:solidFill>
-                  <a:srgbClr val="1C1C1A"/>
+              <a:rPr sz="3700" i="0" b="0">
+                <a:solidFill>
+                  <a:srgbClr val="323330"/>
                 </a:solidFill>
                 <a:latin typeface="Outfit 1 Light"/>
               </a:rPr>
@@ -10021,13 +10254,13 @@
           <a:p>
             <a:pPr algn="l">
               <a:lnSpc>
-                <a:spcPct val="126000"/>
+                <a:spcPts val="5180"/>
               </a:lnSpc>
             </a:pPr>
             <a:r>
-              <a:rPr sz="6200" i="0" b="0">
-                <a:solidFill>
-                  <a:srgbClr val="1C1C1A"/>
+              <a:rPr sz="3700" i="0" b="0">
+                <a:solidFill>
+                  <a:srgbClr val="323330"/>
                 </a:solidFill>
                 <a:latin typeface="Outfit 1 Light"/>
               </a:rPr>
@@ -10142,8 +10375,8 @@
         </p:nvSpPr>
         <p:spPr>
           <a:xfrm>
-            <a:off x="2011680" y="2981279"/>
-            <a:ext cx="14264640" cy="882396"/>
+            <a:off x="2011680" y="3162173"/>
+            <a:ext cx="14264640" cy="1005078"/>
           </a:xfrm>
           <a:prstGeom prst="rect">
             <a:avLst/>
@@ -10158,7 +10391,7 @@
           <a:p>
             <a:pPr algn="l">
               <a:lnSpc>
-                <a:spcPct val="114000"/>
+                <a:spcPts val="5754"/>
               </a:lnSpc>
             </a:pPr>
             <a:r>
@@ -10181,14 +10414,14 @@
         </p:nvSpPr>
         <p:spPr>
           <a:xfrm>
-            <a:off x="2011680" y="3918173"/>
+            <a:off x="2011680" y="4075811"/>
             <a:ext cx="14264640" cy="10973"/>
           </a:xfrm>
           <a:prstGeom prst="rect">
             <a:avLst/>
           </a:prstGeom>
           <a:solidFill>
-            <a:srgbClr val="DFDDD7"/>
+            <a:srgbClr val="A5A49F"/>
           </a:solidFill>
           <a:ln>
             <a:noFill/>
@@ -10225,8 +10458,8 @@
         </p:nvSpPr>
         <p:spPr>
           <a:xfrm>
-            <a:off x="2011680" y="4265645"/>
-            <a:ext cx="12252960" cy="1149706"/>
+            <a:off x="2011680" y="4423283"/>
+            <a:ext cx="12252960" cy="980440"/>
           </a:xfrm>
           <a:prstGeom prst="rect">
             <a:avLst/>
@@ -10241,11 +10474,11 @@
           <a:p>
             <a:pPr algn="l">
               <a:lnSpc>
-                <a:spcPct val="140000"/>
+                <a:spcPts val="3500"/>
               </a:lnSpc>
             </a:pPr>
             <a:r>
-              <a:rPr sz="2400" i="0" b="0">
+              <a:rPr sz="2500" i="0" b="0">
                 <a:solidFill>
                   <a:srgbClr val="6B6B66"/>
                 </a:solidFill>
@@ -10264,8 +10497,8 @@
         </p:nvSpPr>
         <p:spPr>
           <a:xfrm>
-            <a:off x="2011680" y="5653095"/>
-            <a:ext cx="12252960" cy="1149706"/>
+            <a:off x="2011680" y="5641467"/>
+            <a:ext cx="12252960" cy="980440"/>
           </a:xfrm>
           <a:prstGeom prst="rect">
             <a:avLst/>
@@ -10280,11 +10513,11 @@
           <a:p>
             <a:pPr algn="l">
               <a:lnSpc>
-                <a:spcPct val="140000"/>
+                <a:spcPts val="3500"/>
               </a:lnSpc>
             </a:pPr>
             <a:r>
-              <a:rPr sz="2400" i="0" b="0">
+              <a:rPr sz="2500" i="0" b="0">
                 <a:solidFill>
                   <a:srgbClr val="6B6B66"/>
                 </a:solidFill>
@@ -10443,14 +10676,14 @@
         </p:nvSpPr>
         <p:spPr>
           <a:xfrm>
-            <a:off x="11932920" y="4010101"/>
+            <a:off x="11932920" y="3815588"/>
             <a:ext cx="1188720" cy="27432"/>
           </a:xfrm>
           <a:prstGeom prst="rect">
             <a:avLst/>
           </a:prstGeom>
           <a:solidFill>
-            <a:srgbClr val="A9724A"/>
+            <a:srgbClr val="CC754E"/>
           </a:solidFill>
           <a:ln>
             <a:noFill/>
@@ -10487,7 +10720,7 @@
         </p:nvSpPr>
         <p:spPr>
           <a:xfrm>
-            <a:off x="11932920" y="4320997"/>
+            <a:off x="11932920" y="4126484"/>
             <a:ext cx="5760720" cy="292608"/>
           </a:xfrm>
           <a:prstGeom prst="rect">
@@ -10503,13 +10736,13 @@
           <a:p>
             <a:pPr algn="l">
               <a:lnSpc>
-                <a:spcPct val="140000"/>
+                <a:spcPts val="1959"/>
               </a:lnSpc>
             </a:pPr>
             <a:r>
               <a:rPr sz="1400" i="0" b="0" spc="300">
                 <a:solidFill>
-                  <a:srgbClr val="A9724A"/>
+                  <a:srgbClr val="CC754E"/>
                 </a:solidFill>
                 <a:latin typeface="Outfit 1 Semi-Bold"/>
               </a:rPr>
@@ -10526,8 +10759,8 @@
         </p:nvSpPr>
         <p:spPr>
           <a:xfrm>
-            <a:off x="11932920" y="4887925"/>
-            <a:ext cx="5760720" cy="1480414"/>
+            <a:off x="11932920" y="4693412"/>
+            <a:ext cx="5760720" cy="1869440"/>
           </a:xfrm>
           <a:prstGeom prst="rect">
             <a:avLst/>
@@ -10542,11 +10775,11 @@
           <a:p>
             <a:pPr algn="l">
               <a:lnSpc>
-                <a:spcPct val="140000"/>
+                <a:spcPts val="3500"/>
               </a:lnSpc>
             </a:pPr>
             <a:r>
-              <a:rPr sz="2100" i="0" b="0">
+              <a:rPr sz="2500" i="0" b="0">
                 <a:solidFill>
                   <a:srgbClr val="6B6B66"/>
                 </a:solidFill>
@@ -10565,8 +10798,8 @@
         </p:nvSpPr>
         <p:spPr>
           <a:xfrm>
-            <a:off x="2011680" y="2477628"/>
-            <a:ext cx="8458200" cy="882396"/>
+            <a:off x="2011680" y="2547112"/>
+            <a:ext cx="8458200" cy="1005078"/>
           </a:xfrm>
           <a:prstGeom prst="rect">
             <a:avLst/>
@@ -10581,7 +10814,7 @@
           <a:p>
             <a:pPr algn="l">
               <a:lnSpc>
-                <a:spcPct val="114000"/>
+                <a:spcPts val="5754"/>
               </a:lnSpc>
             </a:pPr>
             <a:r>
@@ -10591,7 +10824,16 @@
                 </a:solidFill>
                 <a:latin typeface="Outfit 1 Light"/>
               </a:rPr>
-              <a:t>A MENINA QUE NÃO ACEITOU OS LIMITES</a:t>
+              <a:t>A MENINA QUE </a:t>
+            </a:r>
+            <a:r>
+              <a:rPr sz="4200" i="0" b="0">
+                <a:solidFill>
+                  <a:srgbClr val="1C1C1A"/>
+                </a:solidFill>
+                <a:latin typeface="Outfit 1 Bold"/>
+              </a:rPr>
+              <a:t>NÃO ACEITOU OS LIMITES</a:t>
             </a:r>
           </a:p>
         </p:txBody>
@@ -10604,14 +10846,14 @@
         </p:nvSpPr>
         <p:spPr>
           <a:xfrm>
-            <a:off x="2011680" y="4168536"/>
+            <a:off x="2011680" y="4191508"/>
             <a:ext cx="8458200" cy="10973"/>
           </a:xfrm>
           <a:prstGeom prst="rect">
             <a:avLst/>
           </a:prstGeom>
           <a:solidFill>
-            <a:srgbClr val="DFDDD7"/>
+            <a:srgbClr val="A5A49F"/>
           </a:solidFill>
           <a:ln>
             <a:noFill/>
@@ -10648,8 +10890,8 @@
         </p:nvSpPr>
         <p:spPr>
           <a:xfrm>
-            <a:off x="2011680" y="4516008"/>
-            <a:ext cx="8458200" cy="1017422"/>
+            <a:off x="2011680" y="4538980"/>
+            <a:ext cx="8458200" cy="980440"/>
           </a:xfrm>
           <a:prstGeom prst="rect">
             <a:avLst/>
@@ -10664,11 +10906,11 @@
           <a:p>
             <a:pPr algn="l">
               <a:lnSpc>
-                <a:spcPct val="140000"/>
+                <a:spcPts val="3500"/>
               </a:lnSpc>
             </a:pPr>
             <a:r>
-              <a:rPr sz="2100" i="0" b="0">
+              <a:rPr sz="2500" i="0" b="0">
                 <a:solidFill>
                   <a:srgbClr val="6B6B66"/>
                 </a:solidFill>
@@ -10687,8 +10929,8 @@
         </p:nvSpPr>
         <p:spPr>
           <a:xfrm>
-            <a:off x="2011680" y="5771175"/>
-            <a:ext cx="8458200" cy="1017422"/>
+            <a:off x="2011680" y="5757164"/>
+            <a:ext cx="8458200" cy="980440"/>
           </a:xfrm>
           <a:prstGeom prst="rect">
             <a:avLst/>
@@ -10703,11 +10945,11 @@
           <a:p>
             <a:pPr algn="l">
               <a:lnSpc>
-                <a:spcPct val="140000"/>
+                <a:spcPts val="3500"/>
               </a:lnSpc>
             </a:pPr>
             <a:r>
-              <a:rPr sz="2100" i="0" b="0">
+              <a:rPr sz="2500" i="0" b="0">
                 <a:solidFill>
                   <a:srgbClr val="6B6B66"/>
                 </a:solidFill>
@@ -10726,8 +10968,8 @@
         </p:nvSpPr>
         <p:spPr>
           <a:xfrm>
-            <a:off x="2011680" y="7026341"/>
-            <a:ext cx="8458200" cy="554431"/>
+            <a:off x="2011680" y="6975348"/>
+            <a:ext cx="8458200" cy="535940"/>
           </a:xfrm>
           <a:prstGeom prst="rect">
             <a:avLst/>
@@ -10742,11 +10984,11 @@
           <a:p>
             <a:pPr algn="l">
               <a:lnSpc>
-                <a:spcPct val="140000"/>
+                <a:spcPts val="3500"/>
               </a:lnSpc>
             </a:pPr>
             <a:r>
-              <a:rPr sz="2100" i="0" b="0">
+              <a:rPr sz="2500" i="0" b="0">
                 <a:solidFill>
                   <a:srgbClr val="6B6B66"/>
                 </a:solidFill>
@@ -10863,8 +11105,8 @@
         </p:nvSpPr>
         <p:spPr>
           <a:xfrm>
-            <a:off x="2011680" y="2225406"/>
-            <a:ext cx="14264640" cy="882396"/>
+            <a:off x="2011680" y="2222627"/>
+            <a:ext cx="14264640" cy="1005078"/>
           </a:xfrm>
           <a:prstGeom prst="rect">
             <a:avLst/>
@@ -10879,7 +11121,7 @@
           <a:p>
             <a:pPr algn="l">
               <a:lnSpc>
-                <a:spcPct val="114000"/>
+                <a:spcPts val="5754"/>
               </a:lnSpc>
             </a:pPr>
             <a:r>
@@ -10887,9 +11129,18 @@
                 <a:solidFill>
                   <a:srgbClr val="1C1C1A"/>
                 </a:solidFill>
+                <a:latin typeface="Outfit 1 Bold"/>
+              </a:rPr>
+              <a:t>UM PADRÃO</a:t>
+            </a:r>
+            <a:r>
+              <a:rPr sz="4200" i="0" b="0">
+                <a:solidFill>
+                  <a:srgbClr val="1C1C1A"/>
+                </a:solidFill>
                 <a:latin typeface="Outfit 1 Light"/>
               </a:rPr>
-              <a:t>UM PADRÃO QUE ATRAVESSA SUA HISTÓRIA</a:t>
+              <a:t> QUE ATRAVESSA SUA HISTÓRIA</a:t>
             </a:r>
           </a:p>
         </p:txBody>
@@ -10902,54 +11153,10 @@
         </p:nvSpPr>
         <p:spPr>
           <a:xfrm>
-            <a:off x="2011680" y="3162300"/>
+            <a:off x="2011680" y="3136265"/>
             <a:ext cx="14264640" cy="10973"/>
           </a:xfrm>
           <a:prstGeom prst="rect">
-            <a:avLst/>
-          </a:prstGeom>
-          <a:solidFill>
-            <a:srgbClr val="DFDDD7"/>
-          </a:solidFill>
-          <a:ln>
-            <a:noFill/>
-          </a:ln>
-          <a:effectLst/>
-        </p:spPr>
-        <p:style>
-          <a:lnRef idx="1">
-            <a:schemeClr val="accent1"/>
-          </a:lnRef>
-          <a:fillRef idx="3">
-            <a:schemeClr val="accent1"/>
-          </a:fillRef>
-          <a:effectRef idx="2">
-            <a:schemeClr val="accent1"/>
-          </a:effectRef>
-          <a:fontRef idx="minor">
-            <a:schemeClr val="lt1"/>
-          </a:fontRef>
-        </p:style>
-        <p:txBody>
-          <a:bodyPr rtlCol="0" anchor="ctr"/>
-          <a:lstStyle/>
-          <a:p>
-            <a:pPr algn="ctr"/>
-          </a:p>
-        </p:txBody>
-      </p:sp>
-      <p:sp>
-        <p:nvSpPr>
-          <p:cNvPr id="6" name="Oval 5"/>
-          <p:cNvSpPr/>
-          <p:nvPr/>
-        </p:nvSpPr>
-        <p:spPr>
-          <a:xfrm>
-            <a:off x="2018538" y="3617214"/>
-            <a:ext cx="77724" cy="77724"/>
-          </a:xfrm>
-          <a:prstGeom prst="ellipse">
             <a:avLst/>
           </a:prstGeom>
           <a:solidFill>
@@ -10984,59 +11191,20 @@
       </p:sp>
       <p:sp>
         <p:nvSpPr>
-          <p:cNvPr id="7" name="TextBox 6"/>
-          <p:cNvSpPr txBox="1"/>
-          <p:nvPr/>
-        </p:nvSpPr>
-        <p:spPr>
-          <a:xfrm>
-            <a:off x="2450592" y="3509772"/>
-            <a:ext cx="11448288" cy="576438"/>
-          </a:xfrm>
-          <a:prstGeom prst="rect">
-            <a:avLst/>
-          </a:prstGeom>
-          <a:noFill/>
-        </p:spPr>
-        <p:txBody>
-          <a:bodyPr wrap="square" anchor="t" lIns="0" rIns="0" tIns="0" bIns="0">
-            <a:spAutoFit/>
-          </a:bodyPr>
-          <a:lstStyle/>
-          <a:p>
-            <a:pPr algn="l">
-              <a:lnSpc>
-                <a:spcPct val="140000"/>
-              </a:lnSpc>
-            </a:pPr>
-            <a:r>
-              <a:rPr sz="2400" i="0" b="0">
-                <a:solidFill>
-                  <a:srgbClr val="1C1C1A"/>
-                </a:solidFill>
-                <a:latin typeface="Outfit 1 Light"/>
-              </a:rPr>
-              <a:t>A origem humilde parecia delimitar seu futuro.</a:t>
-            </a:r>
-          </a:p>
-        </p:txBody>
-      </p:sp>
-      <p:sp>
-        <p:nvSpPr>
-          <p:cNvPr id="8" name="Oval 7"/>
+          <p:cNvPr id="6" name="Rectangle 5"/>
           <p:cNvSpPr/>
           <p:nvPr/>
         </p:nvSpPr>
         <p:spPr>
           <a:xfrm>
-            <a:off x="2018538" y="4431396"/>
-            <a:ext cx="77724" cy="77724"/>
-          </a:xfrm>
-          <a:prstGeom prst="ellipse">
+            <a:off x="2015338" y="3657473"/>
+            <a:ext cx="102413" cy="102413"/>
+          </a:xfrm>
+          <a:prstGeom prst="rect">
             <a:avLst/>
           </a:prstGeom>
           <a:solidFill>
-            <a:srgbClr val="A5A49F"/>
+            <a:srgbClr val="CC754E"/>
           </a:solidFill>
           <a:ln>
             <a:noFill/>
@@ -11067,14 +11235,14 @@
       </p:sp>
       <p:sp>
         <p:nvSpPr>
-          <p:cNvPr id="9" name="TextBox 8"/>
+          <p:cNvPr id="7" name="TextBox 6"/>
           <p:cNvSpPr txBox="1"/>
           <p:nvPr/>
         </p:nvSpPr>
         <p:spPr>
           <a:xfrm>
-            <a:off x="2450592" y="4323954"/>
-            <a:ext cx="11448288" cy="576438"/>
+            <a:off x="2538374" y="3483737"/>
+            <a:ext cx="11360506" cy="588264"/>
           </a:xfrm>
           <a:prstGeom prst="rect">
             <a:avLst/>
@@ -11089,37 +11257,37 @@
           <a:p>
             <a:pPr algn="l">
               <a:lnSpc>
-                <a:spcPct val="140000"/>
+                <a:spcPts val="4200"/>
               </a:lnSpc>
             </a:pPr>
             <a:r>
-              <a:rPr sz="2400" i="0" b="0">
+              <a:rPr sz="3000" i="0" b="0">
                 <a:solidFill>
                   <a:srgbClr val="1C1C1A"/>
                 </a:solidFill>
                 <a:latin typeface="Outfit 1 Light"/>
               </a:rPr>
-              <a:t>A função de projetista limitava seu crescimento.</a:t>
-            </a:r>
-          </a:p>
-        </p:txBody>
-      </p:sp>
-      <p:sp>
-        <p:nvSpPr>
-          <p:cNvPr id="10" name="Oval 9"/>
+              <a:t>A origem humilde parecia delimitar seu futuro.</a:t>
+            </a:r>
+          </a:p>
+        </p:txBody>
+      </p:sp>
+      <p:sp>
+        <p:nvSpPr>
+          <p:cNvPr id="8" name="Rectangle 7"/>
           <p:cNvSpPr/>
           <p:nvPr/>
         </p:nvSpPr>
         <p:spPr>
           <a:xfrm>
-            <a:off x="2018538" y="5245578"/>
-            <a:ext cx="77724" cy="77724"/>
-          </a:xfrm>
-          <a:prstGeom prst="ellipse">
+            <a:off x="2015338" y="4483481"/>
+            <a:ext cx="102413" cy="102413"/>
+          </a:xfrm>
+          <a:prstGeom prst="rect">
             <a:avLst/>
           </a:prstGeom>
           <a:solidFill>
-            <a:srgbClr val="A5A49F"/>
+            <a:srgbClr val="CC754E"/>
           </a:solidFill>
           <a:ln>
             <a:noFill/>
@@ -11150,14 +11318,14 @@
       </p:sp>
       <p:sp>
         <p:nvSpPr>
-          <p:cNvPr id="11" name="TextBox 10"/>
+          <p:cNvPr id="9" name="TextBox 8"/>
           <p:cNvSpPr txBox="1"/>
           <p:nvPr/>
         </p:nvSpPr>
         <p:spPr>
           <a:xfrm>
-            <a:off x="2450592" y="5138136"/>
-            <a:ext cx="11448288" cy="576438"/>
+            <a:off x="2538374" y="4309745"/>
+            <a:ext cx="11360506" cy="588264"/>
           </a:xfrm>
           <a:prstGeom prst="rect">
             <a:avLst/>
@@ -11172,37 +11340,37 @@
           <a:p>
             <a:pPr algn="l">
               <a:lnSpc>
-                <a:spcPct val="140000"/>
+                <a:spcPts val="4200"/>
               </a:lnSpc>
             </a:pPr>
             <a:r>
-              <a:rPr sz="2400" i="0" b="0">
+              <a:rPr sz="3000" i="0" b="0">
                 <a:solidFill>
                   <a:srgbClr val="1C1C1A"/>
                 </a:solidFill>
                 <a:latin typeface="Outfit 1 Light"/>
               </a:rPr>
-              <a:t>As franquias restringiam sua liberdade de criar.</a:t>
-            </a:r>
-          </a:p>
-        </p:txBody>
-      </p:sp>
-      <p:sp>
-        <p:nvSpPr>
-          <p:cNvPr id="12" name="Oval 11"/>
+              <a:t>A função de projetista limitava seu crescimento.</a:t>
+            </a:r>
+          </a:p>
+        </p:txBody>
+      </p:sp>
+      <p:sp>
+        <p:nvSpPr>
+          <p:cNvPr id="10" name="Rectangle 9"/>
           <p:cNvSpPr/>
           <p:nvPr/>
         </p:nvSpPr>
         <p:spPr>
           <a:xfrm>
-            <a:off x="2018538" y="6059760"/>
-            <a:ext cx="77724" cy="77724"/>
-          </a:xfrm>
-          <a:prstGeom prst="ellipse">
+            <a:off x="2015338" y="5309489"/>
+            <a:ext cx="102413" cy="102413"/>
+          </a:xfrm>
+          <a:prstGeom prst="rect">
             <a:avLst/>
           </a:prstGeom>
           <a:solidFill>
-            <a:srgbClr val="A9724A"/>
+            <a:srgbClr val="CC754E"/>
           </a:solidFill>
           <a:ln>
             <a:noFill/>
@@ -11233,14 +11401,14 @@
       </p:sp>
       <p:sp>
         <p:nvSpPr>
-          <p:cNvPr id="13" name="TextBox 12"/>
+          <p:cNvPr id="11" name="TextBox 10"/>
           <p:cNvSpPr txBox="1"/>
           <p:nvPr/>
         </p:nvSpPr>
         <p:spPr>
           <a:xfrm>
-            <a:off x="2450592" y="5952318"/>
-            <a:ext cx="11448288" cy="576438"/>
+            <a:off x="2538374" y="5135753"/>
+            <a:ext cx="11360506" cy="588264"/>
           </a:xfrm>
           <a:prstGeom prst="rect">
             <a:avLst/>
@@ -11255,31 +11423,75 @@
           <a:p>
             <a:pPr algn="l">
               <a:lnSpc>
-                <a:spcPct val="140000"/>
+                <a:spcPts val="4200"/>
               </a:lnSpc>
             </a:pPr>
             <a:r>
-              <a:rPr sz="2400" i="0" b="0">
+              <a:rPr sz="3000" i="0" b="0">
                 <a:solidFill>
                   <a:srgbClr val="1C1C1A"/>
                 </a:solidFill>
                 <a:latin typeface="Outfit 1 Light"/>
               </a:rPr>
-              <a:t>As sobras tinham um destino previsto.</a:t>
-            </a:r>
-          </a:p>
-        </p:txBody>
-      </p:sp>
-      <p:sp>
-        <p:nvSpPr>
-          <p:cNvPr id="14" name="TextBox 13"/>
+              <a:t>As franquias restringiam sua liberdade de criar.</a:t>
+            </a:r>
+          </a:p>
+        </p:txBody>
+      </p:sp>
+      <p:sp>
+        <p:nvSpPr>
+          <p:cNvPr id="12" name="Rectangle 11"/>
+          <p:cNvSpPr/>
+          <p:nvPr/>
+        </p:nvSpPr>
+        <p:spPr>
+          <a:xfrm>
+            <a:off x="2015338" y="6135497"/>
+            <a:ext cx="102413" cy="102413"/>
+          </a:xfrm>
+          <a:prstGeom prst="rect">
+            <a:avLst/>
+          </a:prstGeom>
+          <a:solidFill>
+            <a:srgbClr val="CC754E"/>
+          </a:solidFill>
+          <a:ln>
+            <a:noFill/>
+          </a:ln>
+          <a:effectLst/>
+        </p:spPr>
+        <p:style>
+          <a:lnRef idx="1">
+            <a:schemeClr val="accent1"/>
+          </a:lnRef>
+          <a:fillRef idx="3">
+            <a:schemeClr val="accent1"/>
+          </a:fillRef>
+          <a:effectRef idx="2">
+            <a:schemeClr val="accent1"/>
+          </a:effectRef>
+          <a:fontRef idx="minor">
+            <a:schemeClr val="lt1"/>
+          </a:fontRef>
+        </p:style>
+        <p:txBody>
+          <a:bodyPr rtlCol="0" anchor="ctr"/>
+          <a:lstStyle/>
+          <a:p>
+            <a:pPr algn="ctr"/>
+          </a:p>
+        </p:txBody>
+      </p:sp>
+      <p:sp>
+        <p:nvSpPr>
+          <p:cNvPr id="13" name="TextBox 12"/>
           <p:cNvSpPr txBox="1"/>
           <p:nvPr/>
         </p:nvSpPr>
         <p:spPr>
           <a:xfrm>
-            <a:off x="2011680" y="7004243"/>
-            <a:ext cx="12252960" cy="554431"/>
+            <a:off x="2538374" y="5961761"/>
+            <a:ext cx="11360506" cy="588264"/>
           </a:xfrm>
           <a:prstGeom prst="rect">
             <a:avLst/>
@@ -11294,11 +11506,50 @@
           <a:p>
             <a:pPr algn="l">
               <a:lnSpc>
-                <a:spcPct val="140000"/>
+                <a:spcPts val="4200"/>
               </a:lnSpc>
             </a:pPr>
             <a:r>
-              <a:rPr sz="2100" i="0" b="0">
+              <a:rPr sz="3000" i="0" b="0">
+                <a:solidFill>
+                  <a:srgbClr val="1C1C1A"/>
+                </a:solidFill>
+                <a:latin typeface="Outfit 1 Light"/>
+              </a:rPr>
+              <a:t>As sobras tinham um destino previsto.</a:t>
+            </a:r>
+          </a:p>
+        </p:txBody>
+      </p:sp>
+      <p:sp>
+        <p:nvSpPr>
+          <p:cNvPr id="14" name="TextBox 13"/>
+          <p:cNvSpPr txBox="1"/>
+          <p:nvPr/>
+        </p:nvSpPr>
+        <p:spPr>
+          <a:xfrm>
+            <a:off x="2011680" y="7025513"/>
+            <a:ext cx="12252960" cy="535940"/>
+          </a:xfrm>
+          <a:prstGeom prst="rect">
+            <a:avLst/>
+          </a:prstGeom>
+          <a:noFill/>
+        </p:spPr>
+        <p:txBody>
+          <a:bodyPr wrap="square" anchor="t" lIns="0" rIns="0" tIns="0" bIns="0">
+            <a:spAutoFit/>
+          </a:bodyPr>
+          <a:lstStyle/>
+          <a:p>
+            <a:pPr algn="l">
+              <a:lnSpc>
+                <a:spcPts val="3500"/>
+              </a:lnSpc>
+            </a:pPr>
+            <a:r>
+              <a:rPr sz="2500" i="0" b="0">
                 <a:solidFill>
                   <a:srgbClr val="6B6B66"/>
                 </a:solidFill>
@@ -11416,7 +11667,7 @@
         <p:spPr>
           <a:xfrm>
             <a:off x="2011680" y="1723644"/>
-            <a:ext cx="14264640" cy="882396"/>
+            <a:ext cx="14264640" cy="1005078"/>
           </a:xfrm>
           <a:prstGeom prst="rect">
             <a:avLst/>
@@ -11431,7 +11682,7 @@
           <a:p>
             <a:pPr algn="l">
               <a:lnSpc>
-                <a:spcPct val="114000"/>
+                <a:spcPts val="5754"/>
               </a:lnSpc>
             </a:pPr>
             <a:r>
@@ -11441,7 +11692,25 @@
                 </a:solidFill>
                 <a:latin typeface="Outfit 1 Light"/>
               </a:rPr>
-              <a:t>A ESSÊNCIA EMPREENDEDORA DE FLÁVIA</a:t>
+              <a:t>A </a:t>
+            </a:r>
+            <a:r>
+              <a:rPr sz="4200" i="0" b="0">
+                <a:solidFill>
+                  <a:srgbClr val="1C1C1A"/>
+                </a:solidFill>
+                <a:latin typeface="Outfit 1 Bold"/>
+              </a:rPr>
+              <a:t>ESSÊNCIA</a:t>
+            </a:r>
+            <a:r>
+              <a:rPr sz="4200" i="0" b="0">
+                <a:solidFill>
+                  <a:srgbClr val="1C1C1A"/>
+                </a:solidFill>
+                <a:latin typeface="Outfit 1 Light"/>
+              </a:rPr>
+              <a:t> EMPREENDEDORA DE FLÁVIA</a:t>
             </a:r>
           </a:p>
         </p:txBody>
@@ -11454,14 +11723,14 @@
         </p:nvSpPr>
         <p:spPr>
           <a:xfrm>
-            <a:off x="2011680" y="2660538"/>
+            <a:off x="2011680" y="2637282"/>
             <a:ext cx="14264640" cy="10973"/>
           </a:xfrm>
           <a:prstGeom prst="rect">
             <a:avLst/>
           </a:prstGeom>
           <a:solidFill>
-            <a:srgbClr val="DFDDD7"/>
+            <a:srgbClr val="A5A49F"/>
           </a:solidFill>
           <a:ln>
             <a:noFill/>
@@ -11505,7 +11774,7 @@
             <a:avLst/>
           </a:prstGeom>
           <a:solidFill>
-            <a:srgbClr val="DFDDD7"/>
+            <a:srgbClr val="A5A49F"/>
           </a:solidFill>
           <a:ln>
             <a:noFill/>
@@ -11542,8 +11811,8 @@
         </p:nvSpPr>
         <p:spPr>
           <a:xfrm>
-            <a:off x="2011680" y="3470148"/>
-            <a:ext cx="4754880" cy="256032"/>
+            <a:off x="2011680" y="3506724"/>
+            <a:ext cx="4754880" cy="365760"/>
           </a:xfrm>
           <a:prstGeom prst="rect">
             <a:avLst/>
@@ -11558,13 +11827,13 @@
           <a:p>
             <a:pPr algn="l">
               <a:lnSpc>
-                <a:spcPct val="140000"/>
+                <a:spcPts val="2520"/>
               </a:lnSpc>
             </a:pPr>
             <a:r>
-              <a:rPr sz="1400" i="0" b="0" spc="220">
-                <a:solidFill>
-                  <a:srgbClr val="A5A49F"/>
+              <a:rPr sz="1800" i="0" b="0" spc="282">
+                <a:solidFill>
+                  <a:srgbClr val="1C1C1A"/>
                 </a:solidFill>
                 <a:latin typeface="Outfit 1 Semi-Bold"/>
               </a:rPr>
@@ -11581,8 +11850,8 @@
         </p:nvSpPr>
         <p:spPr>
           <a:xfrm>
-            <a:off x="7132320" y="3396996"/>
-            <a:ext cx="9144000" cy="962406"/>
+            <a:off x="7132320" y="3433572"/>
+            <a:ext cx="9144000" cy="925830"/>
           </a:xfrm>
           <a:prstGeom prst="rect">
             <a:avLst/>
@@ -11597,11 +11866,11 @@
           <a:p>
             <a:pPr algn="l">
               <a:lnSpc>
-                <a:spcPct val="140000"/>
+                <a:spcPts val="3500"/>
               </a:lnSpc>
             </a:pPr>
             <a:r>
-              <a:rPr sz="2400" i="0" b="0">
+              <a:rPr sz="2500" i="0" b="0">
                 <a:solidFill>
                   <a:srgbClr val="1C1C1A"/>
                 </a:solidFill>
@@ -11627,7 +11896,7 @@
             <a:avLst/>
           </a:prstGeom>
           <a:solidFill>
-            <a:srgbClr val="DFDDD7"/>
+            <a:srgbClr val="A5A49F"/>
           </a:solidFill>
           <a:ln>
             <a:noFill/>
@@ -11664,8 +11933,8 @@
         </p:nvSpPr>
         <p:spPr>
           <a:xfrm>
-            <a:off x="2011680" y="4670298"/>
-            <a:ext cx="4754880" cy="256032"/>
+            <a:off x="2011680" y="4706874"/>
+            <a:ext cx="4754880" cy="365760"/>
           </a:xfrm>
           <a:prstGeom prst="rect">
             <a:avLst/>
@@ -11680,13 +11949,13 @@
           <a:p>
             <a:pPr algn="l">
               <a:lnSpc>
-                <a:spcPct val="140000"/>
+                <a:spcPts val="2520"/>
               </a:lnSpc>
             </a:pPr>
             <a:r>
-              <a:rPr sz="1400" i="0" b="0" spc="220">
-                <a:solidFill>
-                  <a:srgbClr val="A5A49F"/>
+              <a:rPr sz="1800" i="0" b="0" spc="282">
+                <a:solidFill>
+                  <a:srgbClr val="1C1C1A"/>
                 </a:solidFill>
                 <a:latin typeface="Outfit 1 Semi-Bold"/>
               </a:rPr>
@@ -11703,8 +11972,8 @@
         </p:nvSpPr>
         <p:spPr>
           <a:xfrm>
-            <a:off x="7132320" y="4597146"/>
-            <a:ext cx="9144000" cy="962406"/>
+            <a:off x="7132320" y="4633722"/>
+            <a:ext cx="9144000" cy="925830"/>
           </a:xfrm>
           <a:prstGeom prst="rect">
             <a:avLst/>
@@ -11719,11 +11988,11 @@
           <a:p>
             <a:pPr algn="l">
               <a:lnSpc>
-                <a:spcPct val="140000"/>
+                <a:spcPts val="3500"/>
               </a:lnSpc>
             </a:pPr>
             <a:r>
-              <a:rPr sz="2400" i="0" b="0">
+              <a:rPr sz="2500" i="0" b="0">
                 <a:solidFill>
                   <a:srgbClr val="1C1C1A"/>
                 </a:solidFill>
@@ -11749,7 +12018,7 @@
             <a:avLst/>
           </a:prstGeom>
           <a:solidFill>
-            <a:srgbClr val="DFDDD7"/>
+            <a:srgbClr val="A5A49F"/>
           </a:solidFill>
           <a:ln>
             <a:noFill/>
@@ -11786,8 +12055,8 @@
         </p:nvSpPr>
         <p:spPr>
           <a:xfrm>
-            <a:off x="2011680" y="5870448"/>
-            <a:ext cx="4754880" cy="256032"/>
+            <a:off x="2011680" y="5907024"/>
+            <a:ext cx="4754880" cy="365760"/>
           </a:xfrm>
           <a:prstGeom prst="rect">
             <a:avLst/>
@@ -11802,13 +12071,13 @@
           <a:p>
             <a:pPr algn="l">
               <a:lnSpc>
-                <a:spcPct val="140000"/>
+                <a:spcPts val="2520"/>
               </a:lnSpc>
             </a:pPr>
             <a:r>
-              <a:rPr sz="1400" i="0" b="0" spc="220">
-                <a:solidFill>
-                  <a:srgbClr val="A5A49F"/>
+              <a:rPr sz="1800" i="0" b="0" spc="282">
+                <a:solidFill>
+                  <a:srgbClr val="1C1C1A"/>
                 </a:solidFill>
                 <a:latin typeface="Outfit 1 Semi-Bold"/>
               </a:rPr>
@@ -11825,8 +12094,8 @@
         </p:nvSpPr>
         <p:spPr>
           <a:xfrm>
-            <a:off x="7132320" y="5797296"/>
-            <a:ext cx="9144000" cy="962406"/>
+            <a:off x="7132320" y="5833872"/>
+            <a:ext cx="9144000" cy="925830"/>
           </a:xfrm>
           <a:prstGeom prst="rect">
             <a:avLst/>
@@ -11841,11 +12110,11 @@
           <a:p>
             <a:pPr algn="l">
               <a:lnSpc>
-                <a:spcPct val="140000"/>
+                <a:spcPts val="3500"/>
               </a:lnSpc>
             </a:pPr>
             <a:r>
-              <a:rPr sz="2400" i="0" b="0">
+              <a:rPr sz="2500" i="0" b="0">
                 <a:solidFill>
                   <a:srgbClr val="1C1C1A"/>
                 </a:solidFill>
@@ -11871,7 +12140,7 @@
             <a:avLst/>
           </a:prstGeom>
           <a:solidFill>
-            <a:srgbClr val="DFDDD7"/>
+            <a:srgbClr val="A5A49F"/>
           </a:solidFill>
           <a:ln>
             <a:noFill/>
@@ -11908,8 +12177,8 @@
         </p:nvSpPr>
         <p:spPr>
           <a:xfrm>
-            <a:off x="2011680" y="7070598"/>
-            <a:ext cx="4754880" cy="256032"/>
+            <a:off x="2011680" y="7107174"/>
+            <a:ext cx="4754880" cy="365760"/>
           </a:xfrm>
           <a:prstGeom prst="rect">
             <a:avLst/>
@@ -11924,13 +12193,13 @@
           <a:p>
             <a:pPr algn="l">
               <a:lnSpc>
-                <a:spcPct val="140000"/>
+                <a:spcPts val="2520"/>
               </a:lnSpc>
             </a:pPr>
             <a:r>
-              <a:rPr sz="1400" i="0" b="0" spc="220">
-                <a:solidFill>
-                  <a:srgbClr val="A9724A"/>
+              <a:rPr sz="1800" i="0" b="0" spc="282">
+                <a:solidFill>
+                  <a:srgbClr val="CC754E"/>
                 </a:solidFill>
                 <a:latin typeface="Outfit 1 Semi-Bold"/>
               </a:rPr>
@@ -11947,8 +12216,8 @@
         </p:nvSpPr>
         <p:spPr>
           <a:xfrm>
-            <a:off x="7132320" y="6997446"/>
-            <a:ext cx="9144000" cy="962406"/>
+            <a:off x="7132320" y="7034022"/>
+            <a:ext cx="9144000" cy="925830"/>
           </a:xfrm>
           <a:prstGeom prst="rect">
             <a:avLst/>
@@ -11963,11 +12232,11 @@
           <a:p>
             <a:pPr algn="l">
               <a:lnSpc>
-                <a:spcPct val="140000"/>
+                <a:spcPts val="3500"/>
               </a:lnSpc>
             </a:pPr>
             <a:r>
-              <a:rPr sz="2400" i="0" b="0">
+              <a:rPr sz="2500" i="0" b="0">
                 <a:solidFill>
                   <a:srgbClr val="1C1C1A"/>
                 </a:solidFill>
@@ -11993,7 +12262,7 @@
             <a:avLst/>
           </a:prstGeom>
           <a:solidFill>
-            <a:srgbClr val="A9724A"/>
+            <a:srgbClr val="CC754E"/>
           </a:solidFill>
           <a:ln>
             <a:noFill/>
@@ -12126,14 +12395,14 @@
         </p:nvSpPr>
         <p:spPr>
           <a:xfrm>
-            <a:off x="594360" y="4010101"/>
+            <a:off x="594360" y="4037838"/>
             <a:ext cx="1188720" cy="27432"/>
           </a:xfrm>
           <a:prstGeom prst="rect">
             <a:avLst/>
           </a:prstGeom>
           <a:solidFill>
-            <a:srgbClr val="A9724A"/>
+            <a:srgbClr val="CC754E"/>
           </a:solidFill>
           <a:ln>
             <a:noFill/>
@@ -12170,7 +12439,7 @@
         </p:nvSpPr>
         <p:spPr>
           <a:xfrm>
-            <a:off x="594360" y="4320997"/>
+            <a:off x="594360" y="4348734"/>
             <a:ext cx="5760720" cy="292608"/>
           </a:xfrm>
           <a:prstGeom prst="rect">
@@ -12186,13 +12455,13 @@
           <a:p>
             <a:pPr algn="l">
               <a:lnSpc>
-                <a:spcPct val="140000"/>
+                <a:spcPts val="1959"/>
               </a:lnSpc>
             </a:pPr>
             <a:r>
               <a:rPr sz="1400" i="0" b="0" spc="300">
                 <a:solidFill>
-                  <a:srgbClr val="A9724A"/>
+                  <a:srgbClr val="CC754E"/>
                 </a:solidFill>
                 <a:latin typeface="Outfit 1 Semi-Bold"/>
               </a:rPr>
@@ -12209,8 +12478,8 @@
         </p:nvSpPr>
         <p:spPr>
           <a:xfrm>
-            <a:off x="594360" y="4887925"/>
-            <a:ext cx="5760720" cy="1480414"/>
+            <a:off x="594360" y="4915662"/>
+            <a:ext cx="5760720" cy="1424940"/>
           </a:xfrm>
           <a:prstGeom prst="rect">
             <a:avLst/>
@@ -12225,11 +12494,11 @@
           <a:p>
             <a:pPr algn="l">
               <a:lnSpc>
-                <a:spcPct val="140000"/>
+                <a:spcPts val="3500"/>
               </a:lnSpc>
             </a:pPr>
             <a:r>
-              <a:rPr sz="2100" i="0" b="0">
+              <a:rPr sz="2500" i="0" b="0">
                 <a:solidFill>
                   <a:srgbClr val="6B6B66"/>
                 </a:solidFill>
@@ -12292,8 +12561,8 @@
         </p:nvSpPr>
         <p:spPr>
           <a:xfrm>
-            <a:off x="7818120" y="2477628"/>
-            <a:ext cx="9601200" cy="882396"/>
+            <a:off x="7818120" y="2547112"/>
+            <a:ext cx="9601200" cy="1005078"/>
           </a:xfrm>
           <a:prstGeom prst="rect">
             <a:avLst/>
@@ -12308,7 +12577,7 @@
           <a:p>
             <a:pPr algn="l">
               <a:lnSpc>
-                <a:spcPct val="114000"/>
+                <a:spcPts val="5754"/>
               </a:lnSpc>
             </a:pPr>
             <a:r>
@@ -12316,9 +12585,18 @@
                 <a:solidFill>
                   <a:srgbClr val="1C1C1A"/>
                 </a:solidFill>
+                <a:latin typeface="Outfit 1 Bold"/>
+              </a:rPr>
+              <a:t>A FORMA</a:t>
+            </a:r>
+            <a:r>
+              <a:rPr sz="4200" i="0" b="0">
+                <a:solidFill>
+                  <a:srgbClr val="1C1C1A"/>
+                </a:solidFill>
                 <a:latin typeface="Outfit 1 Light"/>
               </a:rPr>
-              <a:t>A FORMA COMO EXPRESSÃO DE SUA ESSÊNCIA</a:t>
+              <a:t> COMO EXPRESSÃO DE SUA ESSÊNCIA</a:t>
             </a:r>
           </a:p>
         </p:txBody>
@@ -12331,14 +12609,14 @@
         </p:nvSpPr>
         <p:spPr>
           <a:xfrm>
-            <a:off x="7818120" y="4168536"/>
+            <a:off x="7818120" y="4191508"/>
             <a:ext cx="9601200" cy="10973"/>
           </a:xfrm>
           <a:prstGeom prst="rect">
             <a:avLst/>
           </a:prstGeom>
           <a:solidFill>
-            <a:srgbClr val="DFDDD7"/>
+            <a:srgbClr val="A5A49F"/>
           </a:solidFill>
           <a:ln>
             <a:noFill/>
@@ -12375,8 +12653,8 @@
         </p:nvSpPr>
         <p:spPr>
           <a:xfrm>
-            <a:off x="7818120" y="4516008"/>
-            <a:ext cx="9601200" cy="1017422"/>
+            <a:off x="7818120" y="4538980"/>
+            <a:ext cx="9601200" cy="980440"/>
           </a:xfrm>
           <a:prstGeom prst="rect">
             <a:avLst/>
@@ -12391,11 +12669,11 @@
           <a:p>
             <a:pPr algn="l">
               <a:lnSpc>
-                <a:spcPct val="140000"/>
+                <a:spcPts val="3500"/>
               </a:lnSpc>
             </a:pPr>
             <a:r>
-              <a:rPr sz="2100" i="0" b="0">
+              <a:rPr sz="2500" i="0" b="0">
                 <a:solidFill>
                   <a:srgbClr val="6B6B66"/>
                 </a:solidFill>
@@ -12414,8 +12692,8 @@
         </p:nvSpPr>
         <p:spPr>
           <a:xfrm>
-            <a:off x="7818120" y="5771175"/>
-            <a:ext cx="9601200" cy="1017422"/>
+            <a:off x="7818120" y="5757164"/>
+            <a:ext cx="9601200" cy="980440"/>
           </a:xfrm>
           <a:prstGeom prst="rect">
             <a:avLst/>
@@ -12430,11 +12708,11 @@
           <a:p>
             <a:pPr algn="l">
               <a:lnSpc>
-                <a:spcPct val="140000"/>
+                <a:spcPts val="3500"/>
               </a:lnSpc>
             </a:pPr>
             <a:r>
-              <a:rPr sz="2100" i="0" b="0">
+              <a:rPr sz="2500" i="0" b="0">
                 <a:solidFill>
                   <a:srgbClr val="6B6B66"/>
                 </a:solidFill>
@@ -12453,8 +12731,8 @@
         </p:nvSpPr>
         <p:spPr>
           <a:xfrm>
-            <a:off x="7818120" y="7026341"/>
-            <a:ext cx="9601200" cy="554431"/>
+            <a:off x="7818120" y="6975348"/>
+            <a:ext cx="9601200" cy="535940"/>
           </a:xfrm>
           <a:prstGeom prst="rect">
             <a:avLst/>
@@ -12469,11 +12747,11 @@
           <a:p>
             <a:pPr algn="l">
               <a:lnSpc>
-                <a:spcPct val="140000"/>
+                <a:spcPts val="3500"/>
               </a:lnSpc>
             </a:pPr>
             <a:r>
-              <a:rPr sz="2100" i="0" b="0">
+              <a:rPr sz="2500" i="0" b="0">
                 <a:solidFill>
                   <a:srgbClr val="6B6B66"/>
                 </a:solidFill>
@@ -12632,14 +12910,14 @@
         </p:nvSpPr>
         <p:spPr>
           <a:xfrm>
-            <a:off x="11932920" y="4010101"/>
+            <a:off x="11932920" y="3815588"/>
             <a:ext cx="1188720" cy="27432"/>
           </a:xfrm>
           <a:prstGeom prst="rect">
             <a:avLst/>
           </a:prstGeom>
           <a:solidFill>
-            <a:srgbClr val="A9724A"/>
+            <a:srgbClr val="CC754E"/>
           </a:solidFill>
           <a:ln>
             <a:noFill/>
@@ -12676,7 +12954,7 @@
         </p:nvSpPr>
         <p:spPr>
           <a:xfrm>
-            <a:off x="11932920" y="4320997"/>
+            <a:off x="11932920" y="4126484"/>
             <a:ext cx="5760720" cy="292608"/>
           </a:xfrm>
           <a:prstGeom prst="rect">
@@ -12692,13 +12970,13 @@
           <a:p>
             <a:pPr algn="l">
               <a:lnSpc>
-                <a:spcPct val="140000"/>
+                <a:spcPts val="1959"/>
               </a:lnSpc>
             </a:pPr>
             <a:r>
               <a:rPr sz="1400" i="0" b="0" spc="300">
                 <a:solidFill>
-                  <a:srgbClr val="A9724A"/>
+                  <a:srgbClr val="CC754E"/>
                 </a:solidFill>
                 <a:latin typeface="Outfit 1 Semi-Bold"/>
               </a:rPr>
@@ -12715,8 +12993,8 @@
         </p:nvSpPr>
         <p:spPr>
           <a:xfrm>
-            <a:off x="11932920" y="4887925"/>
-            <a:ext cx="5760720" cy="1480414"/>
+            <a:off x="11932920" y="4693412"/>
+            <a:ext cx="5760720" cy="1869440"/>
           </a:xfrm>
           <a:prstGeom prst="rect">
             <a:avLst/>
@@ -12731,11 +13009,11 @@
           <a:p>
             <a:pPr algn="l">
               <a:lnSpc>
-                <a:spcPct val="140000"/>
+                <a:spcPts val="3500"/>
               </a:lnSpc>
             </a:pPr>
             <a:r>
-              <a:rPr sz="2100" i="0" b="0">
+              <a:rPr sz="2500" i="0" b="0">
                 <a:solidFill>
                   <a:srgbClr val="6B6B66"/>
                 </a:solidFill>
@@ -12754,8 +13032,8 @@
         </p:nvSpPr>
         <p:spPr>
           <a:xfrm>
-            <a:off x="2011680" y="2246132"/>
-            <a:ext cx="8458200" cy="882396"/>
+            <a:off x="2011680" y="2331720"/>
+            <a:ext cx="8458200" cy="1005078"/>
           </a:xfrm>
           <a:prstGeom prst="rect">
             <a:avLst/>
@@ -12770,7 +13048,7 @@
           <a:p>
             <a:pPr algn="l">
               <a:lnSpc>
-                <a:spcPct val="114000"/>
+                <a:spcPts val="5754"/>
               </a:lnSpc>
             </a:pPr>
             <a:r>
@@ -12780,7 +13058,25 @@
                 </a:solidFill>
                 <a:latin typeface="Outfit 1 Light"/>
               </a:rPr>
-              <a:t>A MY HOME REVELA OUTRA FACE DESSA FORÇA</a:t>
+              <a:t>A </a:t>
+            </a:r>
+            <a:r>
+              <a:rPr sz="4200" i="0" b="0">
+                <a:solidFill>
+                  <a:srgbClr val="1C1C1A"/>
+                </a:solidFill>
+                <a:latin typeface="Outfit 1 Bold"/>
+              </a:rPr>
+              <a:t>MY HOME</a:t>
+            </a:r>
+            <a:r>
+              <a:rPr sz="4200" i="0" b="0">
+                <a:solidFill>
+                  <a:srgbClr val="1C1C1A"/>
+                </a:solidFill>
+                <a:latin typeface="Outfit 1 Light"/>
+              </a:rPr>
+              <a:t> REVELA OUTRA FACE DESSA FORÇA</a:t>
             </a:r>
           </a:p>
         </p:txBody>
@@ -12793,14 +13089,14 @@
         </p:nvSpPr>
         <p:spPr>
           <a:xfrm>
-            <a:off x="2011680" y="3937040"/>
+            <a:off x="2011680" y="3976116"/>
             <a:ext cx="8458200" cy="10973"/>
           </a:xfrm>
           <a:prstGeom prst="rect">
             <a:avLst/>
           </a:prstGeom>
           <a:solidFill>
-            <a:srgbClr val="DFDDD7"/>
+            <a:srgbClr val="A5A49F"/>
           </a:solidFill>
           <a:ln>
             <a:noFill/>
@@ -12837,8 +13133,8 @@
         </p:nvSpPr>
         <p:spPr>
           <a:xfrm>
-            <a:off x="2011680" y="4284512"/>
-            <a:ext cx="8458200" cy="1017422"/>
+            <a:off x="2011680" y="4323588"/>
+            <a:ext cx="8458200" cy="980440"/>
           </a:xfrm>
           <a:prstGeom prst="rect">
             <a:avLst/>
@@ -12853,11 +13149,11 @@
           <a:p>
             <a:pPr algn="l">
               <a:lnSpc>
-                <a:spcPct val="140000"/>
+                <a:spcPts val="3500"/>
               </a:lnSpc>
             </a:pPr>
             <a:r>
-              <a:rPr sz="2100" i="0" b="0">
+              <a:rPr sz="2500" i="0" b="0">
                 <a:solidFill>
                   <a:srgbClr val="6B6B66"/>
                 </a:solidFill>
@@ -12876,8 +13172,8 @@
         </p:nvSpPr>
         <p:spPr>
           <a:xfrm>
-            <a:off x="2011680" y="5539679"/>
-            <a:ext cx="8458200" cy="1017422"/>
+            <a:off x="2011680" y="5541772"/>
+            <a:ext cx="8458200" cy="980440"/>
           </a:xfrm>
           <a:prstGeom prst="rect">
             <a:avLst/>
@@ -12892,11 +13188,11 @@
           <a:p>
             <a:pPr algn="l">
               <a:lnSpc>
-                <a:spcPct val="140000"/>
+                <a:spcPts val="3500"/>
               </a:lnSpc>
             </a:pPr>
             <a:r>
-              <a:rPr sz="2100" i="0" b="0">
+              <a:rPr sz="2500" i="0" b="0">
                 <a:solidFill>
                   <a:srgbClr val="6B6B66"/>
                 </a:solidFill>
@@ -12915,8 +13211,8 @@
         </p:nvSpPr>
         <p:spPr>
           <a:xfrm>
-            <a:off x="2011680" y="6794845"/>
-            <a:ext cx="8458200" cy="1017422"/>
+            <a:off x="2011680" y="6759956"/>
+            <a:ext cx="8458200" cy="980440"/>
           </a:xfrm>
           <a:prstGeom prst="rect">
             <a:avLst/>
@@ -12931,11 +13227,11 @@
           <a:p>
             <a:pPr algn="l">
               <a:lnSpc>
-                <a:spcPct val="140000"/>
+                <a:spcPts val="3500"/>
               </a:lnSpc>
             </a:pPr>
             <a:r>
-              <a:rPr sz="2100" i="0" b="0">
+              <a:rPr sz="2500" i="0" b="0">
                 <a:solidFill>
                   <a:srgbClr val="6B6B66"/>
                 </a:solidFill>

--- a/clientes/flavia-muccelin/Duas-Trajetorias-Uma-Nova-Forca-Flavia-e-Elandi.pptx
+++ b/clientes/flavia-muccelin/Duas-Trajetorias-Uma-Nova-Forca-Flavia-e-Elandi.pptx
@@ -4758,7 +4758,7 @@
         <p:spPr>
           <a:xfrm>
             <a:off x="2011680" y="3506724"/>
-            <a:ext cx="4754880" cy="365760"/>
+            <a:ext cx="4754880" cy="388620"/>
           </a:xfrm>
           <a:prstGeom prst="rect">
             <a:avLst/>
@@ -4880,7 +4880,7 @@
         <p:spPr>
           <a:xfrm>
             <a:off x="2011680" y="4706874"/>
-            <a:ext cx="4754880" cy="365760"/>
+            <a:ext cx="4754880" cy="388620"/>
           </a:xfrm>
           <a:prstGeom prst="rect">
             <a:avLst/>
@@ -5002,7 +5002,7 @@
         <p:spPr>
           <a:xfrm>
             <a:off x="2011680" y="5907024"/>
-            <a:ext cx="4754880" cy="365760"/>
+            <a:ext cx="4754880" cy="388620"/>
           </a:xfrm>
           <a:prstGeom prst="rect">
             <a:avLst/>
@@ -5124,7 +5124,7 @@
         <p:spPr>
           <a:xfrm>
             <a:off x="2011680" y="7107174"/>
-            <a:ext cx="4754880" cy="365760"/>
+            <a:ext cx="4754880" cy="388620"/>
           </a:xfrm>
           <a:prstGeom prst="rect">
             <a:avLst/>
@@ -11812,7 +11812,7 @@
         <p:spPr>
           <a:xfrm>
             <a:off x="2011680" y="3506724"/>
-            <a:ext cx="4754880" cy="365760"/>
+            <a:ext cx="4754880" cy="388620"/>
           </a:xfrm>
           <a:prstGeom prst="rect">
             <a:avLst/>
@@ -11934,7 +11934,7 @@
         <p:spPr>
           <a:xfrm>
             <a:off x="2011680" y="4706874"/>
-            <a:ext cx="4754880" cy="365760"/>
+            <a:ext cx="4754880" cy="388620"/>
           </a:xfrm>
           <a:prstGeom prst="rect">
             <a:avLst/>
@@ -12056,7 +12056,7 @@
         <p:spPr>
           <a:xfrm>
             <a:off x="2011680" y="5907024"/>
-            <a:ext cx="4754880" cy="365760"/>
+            <a:ext cx="4754880" cy="388620"/>
           </a:xfrm>
           <a:prstGeom prst="rect">
             <a:avLst/>
@@ -12178,7 +12178,7 @@
         <p:spPr>
           <a:xfrm>
             <a:off x="2011680" y="7107174"/>
-            <a:ext cx="4754880" cy="365760"/>
+            <a:ext cx="4754880" cy="388620"/>
           </a:xfrm>
           <a:prstGeom prst="rect">
             <a:avLst/>
